--- a/DATM PPT.pptx
+++ b/DATM PPT.pptx
@@ -8,13 +8,25 @@
     <p:sldId id="256" r:id="rId2"/>
     <p:sldId id="257" r:id="rId3"/>
     <p:sldId id="258" r:id="rId4"/>
-    <p:sldId id="268" r:id="rId5"/>
-    <p:sldId id="259" r:id="rId6"/>
-    <p:sldId id="261" r:id="rId7"/>
-    <p:sldId id="263" r:id="rId8"/>
-    <p:sldId id="264" r:id="rId9"/>
-    <p:sldId id="266" r:id="rId10"/>
-    <p:sldId id="267" r:id="rId11"/>
+    <p:sldId id="283" r:id="rId5"/>
+    <p:sldId id="268" r:id="rId6"/>
+    <p:sldId id="269" r:id="rId7"/>
+    <p:sldId id="270" r:id="rId8"/>
+    <p:sldId id="271" r:id="rId9"/>
+    <p:sldId id="272" r:id="rId10"/>
+    <p:sldId id="284" r:id="rId11"/>
+    <p:sldId id="273" r:id="rId12"/>
+    <p:sldId id="274" r:id="rId13"/>
+    <p:sldId id="275" r:id="rId14"/>
+    <p:sldId id="276" r:id="rId15"/>
+    <p:sldId id="277" r:id="rId16"/>
+    <p:sldId id="285" r:id="rId17"/>
+    <p:sldId id="278" r:id="rId18"/>
+    <p:sldId id="279" r:id="rId19"/>
+    <p:sldId id="280" r:id="rId20"/>
+    <p:sldId id="281" r:id="rId21"/>
+    <p:sldId id="282" r:id="rId22"/>
+    <p:sldId id="267" r:id="rId23"/>
   </p:sldIdLst>
   <p:sldSz cx="12192000" cy="6858000"/>
   <p:notesSz cx="6858000" cy="9144000"/>
@@ -113,6 +125,11 @@
       </a:defRPr>
     </a:lvl9pPr>
   </p:defaultTextStyle>
+  <p:extLst>
+    <p:ext uri="{EFAFB233-063F-42B5-8137-9DF3F51BA10A}">
+      <p15:sldGuideLst xmlns:p15="http://schemas.microsoft.com/office/powerpoint/2012/main"/>
+    </p:ext>
+  </p:extLst>
 </p:presentation>
 </file>
 
@@ -286,7 +303,7 @@
           <a:p>
             <a:fld id="{48A87A34-81AB-432B-8DAE-1953F412C126}" type="datetimeFigureOut">
               <a:rPr lang="en-US" dirty="0"/>
-              <a:t>5/22/2026</a:t>
+              <a:t>5/29/2026</a:t>
             </a:fld>
             <a:endParaRPr lang="en-US" dirty="0"/>
           </a:p>
@@ -548,7 +565,7 @@
           <a:p>
             <a:fld id="{48A87A34-81AB-432B-8DAE-1953F412C126}" type="datetimeFigureOut">
               <a:rPr lang="en-US" dirty="0"/>
-              <a:t>5/22/2026</a:t>
+              <a:t>5/29/2026</a:t>
             </a:fld>
             <a:endParaRPr lang="en-US" dirty="0"/>
           </a:p>
@@ -775,7 +792,7 @@
             <a:fld id="{48A87A34-81AB-432B-8DAE-1953F412C126}" type="datetimeFigureOut">
               <a:rPr lang="en-US" dirty="0"/>
               <a:pPr/>
-              <a:t>5/22/2026</a:t>
+              <a:t>5/29/2026</a:t>
             </a:fld>
             <a:endParaRPr lang="en-US" dirty="0"/>
           </a:p>
@@ -1081,7 +1098,7 @@
             <a:fld id="{48A87A34-81AB-432B-8DAE-1953F412C126}" type="datetimeFigureOut">
               <a:rPr lang="en-US" dirty="0"/>
               <a:pPr/>
-              <a:t>5/22/2026</a:t>
+              <a:t>5/29/2026</a:t>
             </a:fld>
             <a:endParaRPr lang="en-US" dirty="0"/>
           </a:p>
@@ -1550,7 +1567,7 @@
             <a:fld id="{48A87A34-81AB-432B-8DAE-1953F412C126}" type="datetimeFigureOut">
               <a:rPr lang="en-US" dirty="0"/>
               <a:pPr/>
-              <a:t>5/22/2026</a:t>
+              <a:t>5/29/2026</a:t>
             </a:fld>
             <a:endParaRPr lang="en-US" dirty="0"/>
           </a:p>
@@ -2092,7 +2109,7 @@
           <a:p>
             <a:fld id="{48A87A34-81AB-432B-8DAE-1953F412C126}" type="datetimeFigureOut">
               <a:rPr lang="en-US" dirty="0"/>
-              <a:t>5/22/2026</a:t>
+              <a:t>5/29/2026</a:t>
             </a:fld>
             <a:endParaRPr lang="en-US" dirty="0"/>
           </a:p>
@@ -2861,7 +2878,7 @@
           <a:p>
             <a:fld id="{48A87A34-81AB-432B-8DAE-1953F412C126}" type="datetimeFigureOut">
               <a:rPr lang="en-US" dirty="0"/>
-              <a:t>5/22/2026</a:t>
+              <a:t>5/29/2026</a:t>
             </a:fld>
             <a:endParaRPr lang="en-US" dirty="0"/>
           </a:p>
@@ -3031,7 +3048,7 @@
           <a:p>
             <a:fld id="{48A87A34-81AB-432B-8DAE-1953F412C126}" type="datetimeFigureOut">
               <a:rPr lang="en-US" dirty="0"/>
-              <a:t>5/22/2026</a:t>
+              <a:t>5/29/2026</a:t>
             </a:fld>
             <a:endParaRPr lang="en-US" dirty="0"/>
           </a:p>
@@ -3250,7 +3267,7 @@
             <a:fld id="{48A87A34-81AB-432B-8DAE-1953F412C126}" type="datetimeFigureOut">
               <a:rPr lang="en-US" dirty="0"/>
               <a:pPr/>
-              <a:t>5/22/2026</a:t>
+              <a:t>5/29/2026</a:t>
             </a:fld>
             <a:endParaRPr lang="en-US" dirty="0"/>
           </a:p>
@@ -3425,7 +3442,7 @@
           <a:p>
             <a:fld id="{48A87A34-81AB-432B-8DAE-1953F412C126}" type="datetimeFigureOut">
               <a:rPr lang="en-US" dirty="0"/>
-              <a:t>5/22/2026</a:t>
+              <a:t>5/29/2026</a:t>
             </a:fld>
             <a:endParaRPr lang="en-US" dirty="0"/>
           </a:p>
@@ -3710,7 +3727,7 @@
             <a:fld id="{48A87A34-81AB-432B-8DAE-1953F412C126}" type="datetimeFigureOut">
               <a:rPr lang="en-US" dirty="0"/>
               <a:pPr/>
-              <a:t>5/22/2026</a:t>
+              <a:t>5/29/2026</a:t>
             </a:fld>
             <a:endParaRPr lang="en-US" dirty="0"/>
           </a:p>
@@ -3947,7 +3964,7 @@
           <a:p>
             <a:fld id="{48A87A34-81AB-432B-8DAE-1953F412C126}" type="datetimeFigureOut">
               <a:rPr lang="en-US" dirty="0"/>
-              <a:t>5/22/2026</a:t>
+              <a:t>5/29/2026</a:t>
             </a:fld>
             <a:endParaRPr lang="en-US" dirty="0"/>
           </a:p>
@@ -4321,7 +4338,7 @@
           <a:p>
             <a:fld id="{48A87A34-81AB-432B-8DAE-1953F412C126}" type="datetimeFigureOut">
               <a:rPr lang="en-US" dirty="0"/>
-              <a:t>5/22/2026</a:t>
+              <a:t>5/29/2026</a:t>
             </a:fld>
             <a:endParaRPr lang="en-US" dirty="0"/>
           </a:p>
@@ -4434,7 +4451,7 @@
           <a:p>
             <a:fld id="{48A87A34-81AB-432B-8DAE-1953F412C126}" type="datetimeFigureOut">
               <a:rPr lang="en-US" dirty="0"/>
-              <a:t>5/22/2026</a:t>
+              <a:t>5/29/2026</a:t>
             </a:fld>
             <a:endParaRPr lang="en-US" dirty="0"/>
           </a:p>
@@ -4524,7 +4541,7 @@
           <a:p>
             <a:fld id="{48A87A34-81AB-432B-8DAE-1953F412C126}" type="datetimeFigureOut">
               <a:rPr lang="en-US" dirty="0"/>
-              <a:t>5/22/2026</a:t>
+              <a:t>5/29/2026</a:t>
             </a:fld>
             <a:endParaRPr lang="en-US" dirty="0"/>
           </a:p>
@@ -4768,7 +4785,7 @@
           <a:p>
             <a:fld id="{48A87A34-81AB-432B-8DAE-1953F412C126}" type="datetimeFigureOut">
               <a:rPr lang="en-US" dirty="0"/>
-              <a:t>5/22/2026</a:t>
+              <a:t>5/29/2026</a:t>
             </a:fld>
             <a:endParaRPr lang="en-US" dirty="0"/>
           </a:p>
@@ -5020,7 +5037,7 @@
           <a:p>
             <a:fld id="{48A87A34-81AB-432B-8DAE-1953F412C126}" type="datetimeFigureOut">
               <a:rPr lang="en-US" dirty="0"/>
-              <a:t>5/22/2026</a:t>
+              <a:t>5/29/2026</a:t>
             </a:fld>
             <a:endParaRPr lang="en-US" dirty="0"/>
           </a:p>
@@ -5259,7 +5276,7 @@
             <a:fld id="{48A87A34-81AB-432B-8DAE-1953F412C126}" type="datetimeFigureOut">
               <a:rPr lang="en-US" dirty="0"/>
               <a:pPr/>
-              <a:t>5/22/2026</a:t>
+              <a:t>5/29/2026</a:t>
             </a:fld>
             <a:endParaRPr lang="en-US" dirty="0"/>
           </a:p>
@@ -5786,7 +5803,7 @@
           <p:cNvPr id="2" name="Cím 1">
             <a:extLst>
               <a:ext uri="{FF2B5EF4-FFF2-40B4-BE49-F238E27FC236}">
-                <a16:creationId xmlns:a16="http://schemas.microsoft.com/office/drawing/2014/main" id="{1F5C6A10-E8B9-0DCD-BCAB-208EE1098ACF}"/>
+                <a16:creationId xmlns:a16="http://schemas.microsoft.com/office/drawing/2014/main" id="{A51E25C2-9935-015D-7764-4C37D08E2173}"/>
               </a:ext>
             </a:extLst>
           </p:cNvPr>
@@ -5794,39 +5811,61 @@
             <a:spLocks noGrp="1"/>
           </p:cNvSpPr>
           <p:nvPr>
-            <p:ph type="title"/>
-          </p:nvPr>
-        </p:nvSpPr>
-        <p:spPr>
-          <a:xfrm>
-            <a:off x="0" y="1"/>
-            <a:ext cx="12192000" cy="2877423"/>
-          </a:xfrm>
-        </p:spPr>
-        <p:txBody>
-          <a:bodyPr>
-            <a:normAutofit/>
-          </a:bodyPr>
-          <a:lstStyle/>
-          <a:p>
-            <a:pPr algn="ctr"/>
-            <a:r>
-              <a:rPr lang="hu-HU" sz="8000" dirty="0">
+            <p:ph type="ctrTitle"/>
+          </p:nvPr>
+        </p:nvSpPr>
+        <p:spPr/>
+        <p:txBody>
+          <a:bodyPr/>
+          <a:lstStyle/>
+          <a:p>
+            <a:r>
+              <a:rPr lang="hu-HU" dirty="0">
                 <a:solidFill>
-                  <a:schemeClr val="accent1"/>
+                  <a:srgbClr val="FF0000"/>
                 </a:solidFill>
               </a:rPr>
-              <a:t>Köszönjük a figyelmet</a:t>
-            </a:r>
-          </a:p>
-        </p:txBody>
-      </p:sp>
-      <p:sp>
-        <p:nvSpPr>
-          <p:cNvPr id="3" name="Szöveg helye 2">
+              <a:t>Bakos Dominik kódjai</a:t>
+            </a:r>
+          </a:p>
+        </p:txBody>
+      </p:sp>
+    </p:spTree>
+    <p:extLst>
+      <p:ext uri="{BB962C8B-B14F-4D97-AF65-F5344CB8AC3E}">
+        <p14:creationId xmlns:p14="http://schemas.microsoft.com/office/powerpoint/2010/main" val="3716834363"/>
+      </p:ext>
+    </p:extLst>
+  </p:cSld>
+  <p:clrMapOvr>
+    <a:masterClrMapping/>
+  </p:clrMapOvr>
+</p:sld>
+</file>
+
+<file path=ppt/slides/slide11.xml><?xml version="1.0" encoding="utf-8"?>
+<p:sld xmlns:a="http://schemas.openxmlformats.org/drawingml/2006/main" xmlns:r="http://schemas.openxmlformats.org/officeDocument/2006/relationships" xmlns:p="http://schemas.openxmlformats.org/presentationml/2006/main">
+  <p:cSld>
+    <p:spTree>
+      <p:nvGrpSpPr>
+        <p:cNvPr id="1" name=""/>
+        <p:cNvGrpSpPr/>
+        <p:nvPr/>
+      </p:nvGrpSpPr>
+      <p:grpSpPr>
+        <a:xfrm>
+          <a:off x="0" y="0"/>
+          <a:ext cx="0" cy="0"/>
+          <a:chOff x="0" y="0"/>
+          <a:chExt cx="0" cy="0"/>
+        </a:xfrm>
+      </p:grpSpPr>
+      <p:sp>
+        <p:nvSpPr>
+          <p:cNvPr id="2" name="Cím 1">
             <a:extLst>
               <a:ext uri="{FF2B5EF4-FFF2-40B4-BE49-F238E27FC236}">
-                <a16:creationId xmlns:a16="http://schemas.microsoft.com/office/drawing/2014/main" id="{5DEEC053-1868-41A4-AF72-8A457EBAAE2A}"/>
+                <a16:creationId xmlns:a16="http://schemas.microsoft.com/office/drawing/2014/main" id="{D15D6DBC-91F0-7C6B-8342-305C8BF2F4A6}"/>
               </a:ext>
             </a:extLst>
           </p:cNvPr>
@@ -5834,34 +5873,885 @@
             <a:spLocks noGrp="1"/>
           </p:cNvSpPr>
           <p:nvPr>
-            <p:ph type="body" sz="half" idx="2"/>
-          </p:nvPr>
-        </p:nvSpPr>
-        <p:spPr/>
-        <p:txBody>
-          <a:bodyPr>
-            <a:noAutofit/>
-          </a:bodyPr>
-          <a:lstStyle/>
-          <a:p>
-            <a:r>
-              <a:rPr lang="hu-HU" sz="8000" dirty="0"/>
-              <a:t>D-A.T.M. csapata! </a:t>
-            </a:r>
-            <a:r>
-              <a:rPr lang="hu-HU" sz="8000" dirty="0">
-                <a:sym typeface="Wingdings" panose="05000000000000000000" pitchFamily="2" charset="2"/>
-              </a:rPr>
-              <a:t></a:t>
-            </a:r>
-            <a:endParaRPr lang="hu-HU" sz="8000" dirty="0"/>
+            <p:ph type="title"/>
+          </p:nvPr>
+        </p:nvSpPr>
+        <p:spPr/>
+        <p:txBody>
+          <a:bodyPr/>
+          <a:lstStyle/>
+          <a:p>
+            <a:endParaRPr lang="hu-HU"/>
+          </a:p>
+        </p:txBody>
+      </p:sp>
+      <p:sp>
+        <p:nvSpPr>
+          <p:cNvPr id="3" name="Tartalom helye 2">
+            <a:extLst>
+              <a:ext uri="{FF2B5EF4-FFF2-40B4-BE49-F238E27FC236}">
+                <a16:creationId xmlns:a16="http://schemas.microsoft.com/office/drawing/2014/main" id="{71D0E703-E6B9-3448-425B-030650B1A57D}"/>
+              </a:ext>
+            </a:extLst>
+          </p:cNvPr>
+          <p:cNvSpPr>
+            <a:spLocks noGrp="1"/>
+          </p:cNvSpPr>
+          <p:nvPr>
+            <p:ph sz="half" idx="1"/>
+          </p:nvPr>
+        </p:nvSpPr>
+        <p:spPr/>
+        <p:txBody>
+          <a:bodyPr/>
+          <a:lstStyle/>
+          <a:p>
+            <a:endParaRPr lang="hu-HU"/>
+          </a:p>
+        </p:txBody>
+      </p:sp>
+      <p:sp>
+        <p:nvSpPr>
+          <p:cNvPr id="4" name="Tartalom helye 3">
+            <a:extLst>
+              <a:ext uri="{FF2B5EF4-FFF2-40B4-BE49-F238E27FC236}">
+                <a16:creationId xmlns:a16="http://schemas.microsoft.com/office/drawing/2014/main" id="{662C6D9F-36A3-E7C8-F7ED-686FA56BD6E8}"/>
+              </a:ext>
+            </a:extLst>
+          </p:cNvPr>
+          <p:cNvSpPr>
+            <a:spLocks noGrp="1"/>
+          </p:cNvSpPr>
+          <p:nvPr>
+            <p:ph sz="half" idx="2"/>
+          </p:nvPr>
+        </p:nvSpPr>
+        <p:spPr/>
+        <p:txBody>
+          <a:bodyPr/>
+          <a:lstStyle/>
+          <a:p>
+            <a:endParaRPr lang="hu-HU"/>
           </a:p>
         </p:txBody>
       </p:sp>
     </p:spTree>
     <p:extLst>
       <p:ext uri="{BB962C8B-B14F-4D97-AF65-F5344CB8AC3E}">
-        <p14:creationId xmlns:p14="http://schemas.microsoft.com/office/powerpoint/2010/main" val="698503208"/>
+        <p14:creationId xmlns:p14="http://schemas.microsoft.com/office/powerpoint/2010/main" val="4175928066"/>
+      </p:ext>
+    </p:extLst>
+  </p:cSld>
+  <p:clrMapOvr>
+    <a:masterClrMapping/>
+  </p:clrMapOvr>
+</p:sld>
+</file>
+
+<file path=ppt/slides/slide12.xml><?xml version="1.0" encoding="utf-8"?>
+<p:sld xmlns:a="http://schemas.openxmlformats.org/drawingml/2006/main" xmlns:r="http://schemas.openxmlformats.org/officeDocument/2006/relationships" xmlns:p="http://schemas.openxmlformats.org/presentationml/2006/main">
+  <p:cSld>
+    <p:spTree>
+      <p:nvGrpSpPr>
+        <p:cNvPr id="1" name=""/>
+        <p:cNvGrpSpPr/>
+        <p:nvPr/>
+      </p:nvGrpSpPr>
+      <p:grpSpPr>
+        <a:xfrm>
+          <a:off x="0" y="0"/>
+          <a:ext cx="0" cy="0"/>
+          <a:chOff x="0" y="0"/>
+          <a:chExt cx="0" cy="0"/>
+        </a:xfrm>
+      </p:grpSpPr>
+      <p:sp>
+        <p:nvSpPr>
+          <p:cNvPr id="2" name="Cím 1">
+            <a:extLst>
+              <a:ext uri="{FF2B5EF4-FFF2-40B4-BE49-F238E27FC236}">
+                <a16:creationId xmlns:a16="http://schemas.microsoft.com/office/drawing/2014/main" id="{D15D6DBC-91F0-7C6B-8342-305C8BF2F4A6}"/>
+              </a:ext>
+            </a:extLst>
+          </p:cNvPr>
+          <p:cNvSpPr>
+            <a:spLocks noGrp="1"/>
+          </p:cNvSpPr>
+          <p:nvPr>
+            <p:ph type="title"/>
+          </p:nvPr>
+        </p:nvSpPr>
+        <p:spPr/>
+        <p:txBody>
+          <a:bodyPr/>
+          <a:lstStyle/>
+          <a:p>
+            <a:endParaRPr lang="hu-HU"/>
+          </a:p>
+        </p:txBody>
+      </p:sp>
+      <p:sp>
+        <p:nvSpPr>
+          <p:cNvPr id="3" name="Tartalom helye 2">
+            <a:extLst>
+              <a:ext uri="{FF2B5EF4-FFF2-40B4-BE49-F238E27FC236}">
+                <a16:creationId xmlns:a16="http://schemas.microsoft.com/office/drawing/2014/main" id="{71D0E703-E6B9-3448-425B-030650B1A57D}"/>
+              </a:ext>
+            </a:extLst>
+          </p:cNvPr>
+          <p:cNvSpPr>
+            <a:spLocks noGrp="1"/>
+          </p:cNvSpPr>
+          <p:nvPr>
+            <p:ph sz="half" idx="1"/>
+          </p:nvPr>
+        </p:nvSpPr>
+        <p:spPr/>
+        <p:txBody>
+          <a:bodyPr/>
+          <a:lstStyle/>
+          <a:p>
+            <a:endParaRPr lang="hu-HU"/>
+          </a:p>
+        </p:txBody>
+      </p:sp>
+      <p:sp>
+        <p:nvSpPr>
+          <p:cNvPr id="4" name="Tartalom helye 3">
+            <a:extLst>
+              <a:ext uri="{FF2B5EF4-FFF2-40B4-BE49-F238E27FC236}">
+                <a16:creationId xmlns:a16="http://schemas.microsoft.com/office/drawing/2014/main" id="{662C6D9F-36A3-E7C8-F7ED-686FA56BD6E8}"/>
+              </a:ext>
+            </a:extLst>
+          </p:cNvPr>
+          <p:cNvSpPr>
+            <a:spLocks noGrp="1"/>
+          </p:cNvSpPr>
+          <p:nvPr>
+            <p:ph sz="half" idx="2"/>
+          </p:nvPr>
+        </p:nvSpPr>
+        <p:spPr/>
+        <p:txBody>
+          <a:bodyPr/>
+          <a:lstStyle/>
+          <a:p>
+            <a:endParaRPr lang="hu-HU"/>
+          </a:p>
+        </p:txBody>
+      </p:sp>
+    </p:spTree>
+    <p:extLst>
+      <p:ext uri="{BB962C8B-B14F-4D97-AF65-F5344CB8AC3E}">
+        <p14:creationId xmlns:p14="http://schemas.microsoft.com/office/powerpoint/2010/main" val="1251736357"/>
+      </p:ext>
+    </p:extLst>
+  </p:cSld>
+  <p:clrMapOvr>
+    <a:masterClrMapping/>
+  </p:clrMapOvr>
+</p:sld>
+</file>
+
+<file path=ppt/slides/slide13.xml><?xml version="1.0" encoding="utf-8"?>
+<p:sld xmlns:a="http://schemas.openxmlformats.org/drawingml/2006/main" xmlns:r="http://schemas.openxmlformats.org/officeDocument/2006/relationships" xmlns:p="http://schemas.openxmlformats.org/presentationml/2006/main">
+  <p:cSld>
+    <p:spTree>
+      <p:nvGrpSpPr>
+        <p:cNvPr id="1" name=""/>
+        <p:cNvGrpSpPr/>
+        <p:nvPr/>
+      </p:nvGrpSpPr>
+      <p:grpSpPr>
+        <a:xfrm>
+          <a:off x="0" y="0"/>
+          <a:ext cx="0" cy="0"/>
+          <a:chOff x="0" y="0"/>
+          <a:chExt cx="0" cy="0"/>
+        </a:xfrm>
+      </p:grpSpPr>
+      <p:sp>
+        <p:nvSpPr>
+          <p:cNvPr id="2" name="Cím 1">
+            <a:extLst>
+              <a:ext uri="{FF2B5EF4-FFF2-40B4-BE49-F238E27FC236}">
+                <a16:creationId xmlns:a16="http://schemas.microsoft.com/office/drawing/2014/main" id="{D15D6DBC-91F0-7C6B-8342-305C8BF2F4A6}"/>
+              </a:ext>
+            </a:extLst>
+          </p:cNvPr>
+          <p:cNvSpPr>
+            <a:spLocks noGrp="1"/>
+          </p:cNvSpPr>
+          <p:nvPr>
+            <p:ph type="title"/>
+          </p:nvPr>
+        </p:nvSpPr>
+        <p:spPr/>
+        <p:txBody>
+          <a:bodyPr/>
+          <a:lstStyle/>
+          <a:p>
+            <a:endParaRPr lang="hu-HU"/>
+          </a:p>
+        </p:txBody>
+      </p:sp>
+      <p:sp>
+        <p:nvSpPr>
+          <p:cNvPr id="3" name="Tartalom helye 2">
+            <a:extLst>
+              <a:ext uri="{FF2B5EF4-FFF2-40B4-BE49-F238E27FC236}">
+                <a16:creationId xmlns:a16="http://schemas.microsoft.com/office/drawing/2014/main" id="{71D0E703-E6B9-3448-425B-030650B1A57D}"/>
+              </a:ext>
+            </a:extLst>
+          </p:cNvPr>
+          <p:cNvSpPr>
+            <a:spLocks noGrp="1"/>
+          </p:cNvSpPr>
+          <p:nvPr>
+            <p:ph sz="half" idx="1"/>
+          </p:nvPr>
+        </p:nvSpPr>
+        <p:spPr/>
+        <p:txBody>
+          <a:bodyPr/>
+          <a:lstStyle/>
+          <a:p>
+            <a:endParaRPr lang="hu-HU"/>
+          </a:p>
+        </p:txBody>
+      </p:sp>
+      <p:sp>
+        <p:nvSpPr>
+          <p:cNvPr id="4" name="Tartalom helye 3">
+            <a:extLst>
+              <a:ext uri="{FF2B5EF4-FFF2-40B4-BE49-F238E27FC236}">
+                <a16:creationId xmlns:a16="http://schemas.microsoft.com/office/drawing/2014/main" id="{662C6D9F-36A3-E7C8-F7ED-686FA56BD6E8}"/>
+              </a:ext>
+            </a:extLst>
+          </p:cNvPr>
+          <p:cNvSpPr>
+            <a:spLocks noGrp="1"/>
+          </p:cNvSpPr>
+          <p:nvPr>
+            <p:ph sz="half" idx="2"/>
+          </p:nvPr>
+        </p:nvSpPr>
+        <p:spPr/>
+        <p:txBody>
+          <a:bodyPr/>
+          <a:lstStyle/>
+          <a:p>
+            <a:endParaRPr lang="hu-HU"/>
+          </a:p>
+        </p:txBody>
+      </p:sp>
+    </p:spTree>
+    <p:extLst>
+      <p:ext uri="{BB962C8B-B14F-4D97-AF65-F5344CB8AC3E}">
+        <p14:creationId xmlns:p14="http://schemas.microsoft.com/office/powerpoint/2010/main" val="3769325015"/>
+      </p:ext>
+    </p:extLst>
+  </p:cSld>
+  <p:clrMapOvr>
+    <a:masterClrMapping/>
+  </p:clrMapOvr>
+</p:sld>
+</file>
+
+<file path=ppt/slides/slide14.xml><?xml version="1.0" encoding="utf-8"?>
+<p:sld xmlns:a="http://schemas.openxmlformats.org/drawingml/2006/main" xmlns:r="http://schemas.openxmlformats.org/officeDocument/2006/relationships" xmlns:p="http://schemas.openxmlformats.org/presentationml/2006/main">
+  <p:cSld>
+    <p:spTree>
+      <p:nvGrpSpPr>
+        <p:cNvPr id="1" name=""/>
+        <p:cNvGrpSpPr/>
+        <p:nvPr/>
+      </p:nvGrpSpPr>
+      <p:grpSpPr>
+        <a:xfrm>
+          <a:off x="0" y="0"/>
+          <a:ext cx="0" cy="0"/>
+          <a:chOff x="0" y="0"/>
+          <a:chExt cx="0" cy="0"/>
+        </a:xfrm>
+      </p:grpSpPr>
+      <p:sp>
+        <p:nvSpPr>
+          <p:cNvPr id="2" name="Cím 1">
+            <a:extLst>
+              <a:ext uri="{FF2B5EF4-FFF2-40B4-BE49-F238E27FC236}">
+                <a16:creationId xmlns:a16="http://schemas.microsoft.com/office/drawing/2014/main" id="{D15D6DBC-91F0-7C6B-8342-305C8BF2F4A6}"/>
+              </a:ext>
+            </a:extLst>
+          </p:cNvPr>
+          <p:cNvSpPr>
+            <a:spLocks noGrp="1"/>
+          </p:cNvSpPr>
+          <p:nvPr>
+            <p:ph type="title"/>
+          </p:nvPr>
+        </p:nvSpPr>
+        <p:spPr/>
+        <p:txBody>
+          <a:bodyPr/>
+          <a:lstStyle/>
+          <a:p>
+            <a:endParaRPr lang="hu-HU"/>
+          </a:p>
+        </p:txBody>
+      </p:sp>
+      <p:sp>
+        <p:nvSpPr>
+          <p:cNvPr id="3" name="Tartalom helye 2">
+            <a:extLst>
+              <a:ext uri="{FF2B5EF4-FFF2-40B4-BE49-F238E27FC236}">
+                <a16:creationId xmlns:a16="http://schemas.microsoft.com/office/drawing/2014/main" id="{71D0E703-E6B9-3448-425B-030650B1A57D}"/>
+              </a:ext>
+            </a:extLst>
+          </p:cNvPr>
+          <p:cNvSpPr>
+            <a:spLocks noGrp="1"/>
+          </p:cNvSpPr>
+          <p:nvPr>
+            <p:ph sz="half" idx="1"/>
+          </p:nvPr>
+        </p:nvSpPr>
+        <p:spPr/>
+        <p:txBody>
+          <a:bodyPr/>
+          <a:lstStyle/>
+          <a:p>
+            <a:endParaRPr lang="hu-HU"/>
+          </a:p>
+        </p:txBody>
+      </p:sp>
+      <p:sp>
+        <p:nvSpPr>
+          <p:cNvPr id="4" name="Tartalom helye 3">
+            <a:extLst>
+              <a:ext uri="{FF2B5EF4-FFF2-40B4-BE49-F238E27FC236}">
+                <a16:creationId xmlns:a16="http://schemas.microsoft.com/office/drawing/2014/main" id="{662C6D9F-36A3-E7C8-F7ED-686FA56BD6E8}"/>
+              </a:ext>
+            </a:extLst>
+          </p:cNvPr>
+          <p:cNvSpPr>
+            <a:spLocks noGrp="1"/>
+          </p:cNvSpPr>
+          <p:nvPr>
+            <p:ph sz="half" idx="2"/>
+          </p:nvPr>
+        </p:nvSpPr>
+        <p:spPr/>
+        <p:txBody>
+          <a:bodyPr/>
+          <a:lstStyle/>
+          <a:p>
+            <a:endParaRPr lang="hu-HU"/>
+          </a:p>
+        </p:txBody>
+      </p:sp>
+    </p:spTree>
+    <p:extLst>
+      <p:ext uri="{BB962C8B-B14F-4D97-AF65-F5344CB8AC3E}">
+        <p14:creationId xmlns:p14="http://schemas.microsoft.com/office/powerpoint/2010/main" val="2611702668"/>
+      </p:ext>
+    </p:extLst>
+  </p:cSld>
+  <p:clrMapOvr>
+    <a:masterClrMapping/>
+  </p:clrMapOvr>
+</p:sld>
+</file>
+
+<file path=ppt/slides/slide15.xml><?xml version="1.0" encoding="utf-8"?>
+<p:sld xmlns:a="http://schemas.openxmlformats.org/drawingml/2006/main" xmlns:r="http://schemas.openxmlformats.org/officeDocument/2006/relationships" xmlns:p="http://schemas.openxmlformats.org/presentationml/2006/main">
+  <p:cSld>
+    <p:spTree>
+      <p:nvGrpSpPr>
+        <p:cNvPr id="1" name=""/>
+        <p:cNvGrpSpPr/>
+        <p:nvPr/>
+      </p:nvGrpSpPr>
+      <p:grpSpPr>
+        <a:xfrm>
+          <a:off x="0" y="0"/>
+          <a:ext cx="0" cy="0"/>
+          <a:chOff x="0" y="0"/>
+          <a:chExt cx="0" cy="0"/>
+        </a:xfrm>
+      </p:grpSpPr>
+      <p:sp>
+        <p:nvSpPr>
+          <p:cNvPr id="2" name="Cím 1">
+            <a:extLst>
+              <a:ext uri="{FF2B5EF4-FFF2-40B4-BE49-F238E27FC236}">
+                <a16:creationId xmlns:a16="http://schemas.microsoft.com/office/drawing/2014/main" id="{D15D6DBC-91F0-7C6B-8342-305C8BF2F4A6}"/>
+              </a:ext>
+            </a:extLst>
+          </p:cNvPr>
+          <p:cNvSpPr>
+            <a:spLocks noGrp="1"/>
+          </p:cNvSpPr>
+          <p:nvPr>
+            <p:ph type="title"/>
+          </p:nvPr>
+        </p:nvSpPr>
+        <p:spPr/>
+        <p:txBody>
+          <a:bodyPr/>
+          <a:lstStyle/>
+          <a:p>
+            <a:endParaRPr lang="hu-HU"/>
+          </a:p>
+        </p:txBody>
+      </p:sp>
+      <p:sp>
+        <p:nvSpPr>
+          <p:cNvPr id="3" name="Tartalom helye 2">
+            <a:extLst>
+              <a:ext uri="{FF2B5EF4-FFF2-40B4-BE49-F238E27FC236}">
+                <a16:creationId xmlns:a16="http://schemas.microsoft.com/office/drawing/2014/main" id="{71D0E703-E6B9-3448-425B-030650B1A57D}"/>
+              </a:ext>
+            </a:extLst>
+          </p:cNvPr>
+          <p:cNvSpPr>
+            <a:spLocks noGrp="1"/>
+          </p:cNvSpPr>
+          <p:nvPr>
+            <p:ph sz="half" idx="1"/>
+          </p:nvPr>
+        </p:nvSpPr>
+        <p:spPr/>
+        <p:txBody>
+          <a:bodyPr/>
+          <a:lstStyle/>
+          <a:p>
+            <a:endParaRPr lang="hu-HU"/>
+          </a:p>
+        </p:txBody>
+      </p:sp>
+      <p:sp>
+        <p:nvSpPr>
+          <p:cNvPr id="4" name="Tartalom helye 3">
+            <a:extLst>
+              <a:ext uri="{FF2B5EF4-FFF2-40B4-BE49-F238E27FC236}">
+                <a16:creationId xmlns:a16="http://schemas.microsoft.com/office/drawing/2014/main" id="{662C6D9F-36A3-E7C8-F7ED-686FA56BD6E8}"/>
+              </a:ext>
+            </a:extLst>
+          </p:cNvPr>
+          <p:cNvSpPr>
+            <a:spLocks noGrp="1"/>
+          </p:cNvSpPr>
+          <p:nvPr>
+            <p:ph sz="half" idx="2"/>
+          </p:nvPr>
+        </p:nvSpPr>
+        <p:spPr/>
+        <p:txBody>
+          <a:bodyPr/>
+          <a:lstStyle/>
+          <a:p>
+            <a:endParaRPr lang="hu-HU"/>
+          </a:p>
+        </p:txBody>
+      </p:sp>
+    </p:spTree>
+    <p:extLst>
+      <p:ext uri="{BB962C8B-B14F-4D97-AF65-F5344CB8AC3E}">
+        <p14:creationId xmlns:p14="http://schemas.microsoft.com/office/powerpoint/2010/main" val="1290062965"/>
+      </p:ext>
+    </p:extLst>
+  </p:cSld>
+  <p:clrMapOvr>
+    <a:masterClrMapping/>
+  </p:clrMapOvr>
+</p:sld>
+</file>
+
+<file path=ppt/slides/slide16.xml><?xml version="1.0" encoding="utf-8"?>
+<p:sld xmlns:a="http://schemas.openxmlformats.org/drawingml/2006/main" xmlns:r="http://schemas.openxmlformats.org/officeDocument/2006/relationships" xmlns:p="http://schemas.openxmlformats.org/presentationml/2006/main">
+  <p:cSld>
+    <p:spTree>
+      <p:nvGrpSpPr>
+        <p:cNvPr id="1" name=""/>
+        <p:cNvGrpSpPr/>
+        <p:nvPr/>
+      </p:nvGrpSpPr>
+      <p:grpSpPr>
+        <a:xfrm>
+          <a:off x="0" y="0"/>
+          <a:ext cx="0" cy="0"/>
+          <a:chOff x="0" y="0"/>
+          <a:chExt cx="0" cy="0"/>
+        </a:xfrm>
+      </p:grpSpPr>
+      <p:sp>
+        <p:nvSpPr>
+          <p:cNvPr id="2" name="Cím 1">
+            <a:extLst>
+              <a:ext uri="{FF2B5EF4-FFF2-40B4-BE49-F238E27FC236}">
+                <a16:creationId xmlns:a16="http://schemas.microsoft.com/office/drawing/2014/main" id="{9E742ABC-0D08-98DF-0DD2-B0A7D29BA59B}"/>
+              </a:ext>
+            </a:extLst>
+          </p:cNvPr>
+          <p:cNvSpPr>
+            <a:spLocks noGrp="1"/>
+          </p:cNvSpPr>
+          <p:nvPr>
+            <p:ph type="ctrTitle"/>
+          </p:nvPr>
+        </p:nvSpPr>
+        <p:spPr/>
+        <p:txBody>
+          <a:bodyPr/>
+          <a:lstStyle/>
+          <a:p>
+            <a:r>
+              <a:rPr lang="hu-HU" dirty="0">
+                <a:solidFill>
+                  <a:srgbClr val="FF0000"/>
+                </a:solidFill>
+              </a:rPr>
+              <a:t>Farkas </a:t>
+            </a:r>
+            <a:r>
+              <a:rPr lang="hu-HU" dirty="0" err="1">
+                <a:solidFill>
+                  <a:srgbClr val="FF0000"/>
+                </a:solidFill>
+              </a:rPr>
+              <a:t>máté</a:t>
+            </a:r>
+            <a:r>
+              <a:rPr lang="hu-HU" dirty="0">
+                <a:solidFill>
+                  <a:srgbClr val="FF0000"/>
+                </a:solidFill>
+              </a:rPr>
+              <a:t> kódjai</a:t>
+            </a:r>
+          </a:p>
+        </p:txBody>
+      </p:sp>
+    </p:spTree>
+    <p:extLst>
+      <p:ext uri="{BB962C8B-B14F-4D97-AF65-F5344CB8AC3E}">
+        <p14:creationId xmlns:p14="http://schemas.microsoft.com/office/powerpoint/2010/main" val="1169427346"/>
+      </p:ext>
+    </p:extLst>
+  </p:cSld>
+  <p:clrMapOvr>
+    <a:masterClrMapping/>
+  </p:clrMapOvr>
+</p:sld>
+</file>
+
+<file path=ppt/slides/slide17.xml><?xml version="1.0" encoding="utf-8"?>
+<p:sld xmlns:a="http://schemas.openxmlformats.org/drawingml/2006/main" xmlns:r="http://schemas.openxmlformats.org/officeDocument/2006/relationships" xmlns:p="http://schemas.openxmlformats.org/presentationml/2006/main">
+  <p:cSld>
+    <p:spTree>
+      <p:nvGrpSpPr>
+        <p:cNvPr id="1" name=""/>
+        <p:cNvGrpSpPr/>
+        <p:nvPr/>
+      </p:nvGrpSpPr>
+      <p:grpSpPr>
+        <a:xfrm>
+          <a:off x="0" y="0"/>
+          <a:ext cx="0" cy="0"/>
+          <a:chOff x="0" y="0"/>
+          <a:chExt cx="0" cy="0"/>
+        </a:xfrm>
+      </p:grpSpPr>
+      <p:sp>
+        <p:nvSpPr>
+          <p:cNvPr id="2" name="Cím 1">
+            <a:extLst>
+              <a:ext uri="{FF2B5EF4-FFF2-40B4-BE49-F238E27FC236}">
+                <a16:creationId xmlns:a16="http://schemas.microsoft.com/office/drawing/2014/main" id="{D15D6DBC-91F0-7C6B-8342-305C8BF2F4A6}"/>
+              </a:ext>
+            </a:extLst>
+          </p:cNvPr>
+          <p:cNvSpPr>
+            <a:spLocks noGrp="1"/>
+          </p:cNvSpPr>
+          <p:nvPr>
+            <p:ph type="title"/>
+          </p:nvPr>
+        </p:nvSpPr>
+        <p:spPr/>
+        <p:txBody>
+          <a:bodyPr/>
+          <a:lstStyle/>
+          <a:p>
+            <a:endParaRPr lang="hu-HU"/>
+          </a:p>
+        </p:txBody>
+      </p:sp>
+      <p:sp>
+        <p:nvSpPr>
+          <p:cNvPr id="3" name="Tartalom helye 2">
+            <a:extLst>
+              <a:ext uri="{FF2B5EF4-FFF2-40B4-BE49-F238E27FC236}">
+                <a16:creationId xmlns:a16="http://schemas.microsoft.com/office/drawing/2014/main" id="{71D0E703-E6B9-3448-425B-030650B1A57D}"/>
+              </a:ext>
+            </a:extLst>
+          </p:cNvPr>
+          <p:cNvSpPr>
+            <a:spLocks noGrp="1"/>
+          </p:cNvSpPr>
+          <p:nvPr>
+            <p:ph sz="half" idx="1"/>
+          </p:nvPr>
+        </p:nvSpPr>
+        <p:spPr/>
+        <p:txBody>
+          <a:bodyPr/>
+          <a:lstStyle/>
+          <a:p>
+            <a:endParaRPr lang="hu-HU"/>
+          </a:p>
+        </p:txBody>
+      </p:sp>
+      <p:sp>
+        <p:nvSpPr>
+          <p:cNvPr id="4" name="Tartalom helye 3">
+            <a:extLst>
+              <a:ext uri="{FF2B5EF4-FFF2-40B4-BE49-F238E27FC236}">
+                <a16:creationId xmlns:a16="http://schemas.microsoft.com/office/drawing/2014/main" id="{662C6D9F-36A3-E7C8-F7ED-686FA56BD6E8}"/>
+              </a:ext>
+            </a:extLst>
+          </p:cNvPr>
+          <p:cNvSpPr>
+            <a:spLocks noGrp="1"/>
+          </p:cNvSpPr>
+          <p:nvPr>
+            <p:ph sz="half" idx="2"/>
+          </p:nvPr>
+        </p:nvSpPr>
+        <p:spPr/>
+        <p:txBody>
+          <a:bodyPr/>
+          <a:lstStyle/>
+          <a:p>
+            <a:endParaRPr lang="hu-HU"/>
+          </a:p>
+        </p:txBody>
+      </p:sp>
+    </p:spTree>
+    <p:extLst>
+      <p:ext uri="{BB962C8B-B14F-4D97-AF65-F5344CB8AC3E}">
+        <p14:creationId xmlns:p14="http://schemas.microsoft.com/office/powerpoint/2010/main" val="1066481337"/>
+      </p:ext>
+    </p:extLst>
+  </p:cSld>
+  <p:clrMapOvr>
+    <a:masterClrMapping/>
+  </p:clrMapOvr>
+</p:sld>
+</file>
+
+<file path=ppt/slides/slide18.xml><?xml version="1.0" encoding="utf-8"?>
+<p:sld xmlns:a="http://schemas.openxmlformats.org/drawingml/2006/main" xmlns:r="http://schemas.openxmlformats.org/officeDocument/2006/relationships" xmlns:p="http://schemas.openxmlformats.org/presentationml/2006/main">
+  <p:cSld>
+    <p:spTree>
+      <p:nvGrpSpPr>
+        <p:cNvPr id="1" name=""/>
+        <p:cNvGrpSpPr/>
+        <p:nvPr/>
+      </p:nvGrpSpPr>
+      <p:grpSpPr>
+        <a:xfrm>
+          <a:off x="0" y="0"/>
+          <a:ext cx="0" cy="0"/>
+          <a:chOff x="0" y="0"/>
+          <a:chExt cx="0" cy="0"/>
+        </a:xfrm>
+      </p:grpSpPr>
+      <p:sp>
+        <p:nvSpPr>
+          <p:cNvPr id="2" name="Cím 1">
+            <a:extLst>
+              <a:ext uri="{FF2B5EF4-FFF2-40B4-BE49-F238E27FC236}">
+                <a16:creationId xmlns:a16="http://schemas.microsoft.com/office/drawing/2014/main" id="{D15D6DBC-91F0-7C6B-8342-305C8BF2F4A6}"/>
+              </a:ext>
+            </a:extLst>
+          </p:cNvPr>
+          <p:cNvSpPr>
+            <a:spLocks noGrp="1"/>
+          </p:cNvSpPr>
+          <p:nvPr>
+            <p:ph type="title"/>
+          </p:nvPr>
+        </p:nvSpPr>
+        <p:spPr/>
+        <p:txBody>
+          <a:bodyPr/>
+          <a:lstStyle/>
+          <a:p>
+            <a:endParaRPr lang="hu-HU"/>
+          </a:p>
+        </p:txBody>
+      </p:sp>
+      <p:sp>
+        <p:nvSpPr>
+          <p:cNvPr id="3" name="Tartalom helye 2">
+            <a:extLst>
+              <a:ext uri="{FF2B5EF4-FFF2-40B4-BE49-F238E27FC236}">
+                <a16:creationId xmlns:a16="http://schemas.microsoft.com/office/drawing/2014/main" id="{71D0E703-E6B9-3448-425B-030650B1A57D}"/>
+              </a:ext>
+            </a:extLst>
+          </p:cNvPr>
+          <p:cNvSpPr>
+            <a:spLocks noGrp="1"/>
+          </p:cNvSpPr>
+          <p:nvPr>
+            <p:ph sz="half" idx="1"/>
+          </p:nvPr>
+        </p:nvSpPr>
+        <p:spPr/>
+        <p:txBody>
+          <a:bodyPr/>
+          <a:lstStyle/>
+          <a:p>
+            <a:endParaRPr lang="hu-HU"/>
+          </a:p>
+        </p:txBody>
+      </p:sp>
+      <p:sp>
+        <p:nvSpPr>
+          <p:cNvPr id="4" name="Tartalom helye 3">
+            <a:extLst>
+              <a:ext uri="{FF2B5EF4-FFF2-40B4-BE49-F238E27FC236}">
+                <a16:creationId xmlns:a16="http://schemas.microsoft.com/office/drawing/2014/main" id="{662C6D9F-36A3-E7C8-F7ED-686FA56BD6E8}"/>
+              </a:ext>
+            </a:extLst>
+          </p:cNvPr>
+          <p:cNvSpPr>
+            <a:spLocks noGrp="1"/>
+          </p:cNvSpPr>
+          <p:nvPr>
+            <p:ph sz="half" idx="2"/>
+          </p:nvPr>
+        </p:nvSpPr>
+        <p:spPr/>
+        <p:txBody>
+          <a:bodyPr/>
+          <a:lstStyle/>
+          <a:p>
+            <a:endParaRPr lang="hu-HU"/>
+          </a:p>
+        </p:txBody>
+      </p:sp>
+    </p:spTree>
+    <p:extLst>
+      <p:ext uri="{BB962C8B-B14F-4D97-AF65-F5344CB8AC3E}">
+        <p14:creationId xmlns:p14="http://schemas.microsoft.com/office/powerpoint/2010/main" val="280104775"/>
+      </p:ext>
+    </p:extLst>
+  </p:cSld>
+  <p:clrMapOvr>
+    <a:masterClrMapping/>
+  </p:clrMapOvr>
+</p:sld>
+</file>
+
+<file path=ppt/slides/slide19.xml><?xml version="1.0" encoding="utf-8"?>
+<p:sld xmlns:a="http://schemas.openxmlformats.org/drawingml/2006/main" xmlns:r="http://schemas.openxmlformats.org/officeDocument/2006/relationships" xmlns:p="http://schemas.openxmlformats.org/presentationml/2006/main">
+  <p:cSld>
+    <p:spTree>
+      <p:nvGrpSpPr>
+        <p:cNvPr id="1" name=""/>
+        <p:cNvGrpSpPr/>
+        <p:nvPr/>
+      </p:nvGrpSpPr>
+      <p:grpSpPr>
+        <a:xfrm>
+          <a:off x="0" y="0"/>
+          <a:ext cx="0" cy="0"/>
+          <a:chOff x="0" y="0"/>
+          <a:chExt cx="0" cy="0"/>
+        </a:xfrm>
+      </p:grpSpPr>
+      <p:sp>
+        <p:nvSpPr>
+          <p:cNvPr id="2" name="Cím 1">
+            <a:extLst>
+              <a:ext uri="{FF2B5EF4-FFF2-40B4-BE49-F238E27FC236}">
+                <a16:creationId xmlns:a16="http://schemas.microsoft.com/office/drawing/2014/main" id="{D15D6DBC-91F0-7C6B-8342-305C8BF2F4A6}"/>
+              </a:ext>
+            </a:extLst>
+          </p:cNvPr>
+          <p:cNvSpPr>
+            <a:spLocks noGrp="1"/>
+          </p:cNvSpPr>
+          <p:nvPr>
+            <p:ph type="title"/>
+          </p:nvPr>
+        </p:nvSpPr>
+        <p:spPr/>
+        <p:txBody>
+          <a:bodyPr/>
+          <a:lstStyle/>
+          <a:p>
+            <a:endParaRPr lang="hu-HU"/>
+          </a:p>
+        </p:txBody>
+      </p:sp>
+      <p:sp>
+        <p:nvSpPr>
+          <p:cNvPr id="3" name="Tartalom helye 2">
+            <a:extLst>
+              <a:ext uri="{FF2B5EF4-FFF2-40B4-BE49-F238E27FC236}">
+                <a16:creationId xmlns:a16="http://schemas.microsoft.com/office/drawing/2014/main" id="{71D0E703-E6B9-3448-425B-030650B1A57D}"/>
+              </a:ext>
+            </a:extLst>
+          </p:cNvPr>
+          <p:cNvSpPr>
+            <a:spLocks noGrp="1"/>
+          </p:cNvSpPr>
+          <p:nvPr>
+            <p:ph sz="half" idx="1"/>
+          </p:nvPr>
+        </p:nvSpPr>
+        <p:spPr/>
+        <p:txBody>
+          <a:bodyPr/>
+          <a:lstStyle/>
+          <a:p>
+            <a:endParaRPr lang="hu-HU"/>
+          </a:p>
+        </p:txBody>
+      </p:sp>
+      <p:sp>
+        <p:nvSpPr>
+          <p:cNvPr id="4" name="Tartalom helye 3">
+            <a:extLst>
+              <a:ext uri="{FF2B5EF4-FFF2-40B4-BE49-F238E27FC236}">
+                <a16:creationId xmlns:a16="http://schemas.microsoft.com/office/drawing/2014/main" id="{662C6D9F-36A3-E7C8-F7ED-686FA56BD6E8}"/>
+              </a:ext>
+            </a:extLst>
+          </p:cNvPr>
+          <p:cNvSpPr>
+            <a:spLocks noGrp="1"/>
+          </p:cNvSpPr>
+          <p:nvPr>
+            <p:ph sz="half" idx="2"/>
+          </p:nvPr>
+        </p:nvSpPr>
+        <p:spPr/>
+        <p:txBody>
+          <a:bodyPr/>
+          <a:lstStyle/>
+          <a:p>
+            <a:endParaRPr lang="hu-HU"/>
+          </a:p>
+        </p:txBody>
+      </p:sp>
+    </p:spTree>
+    <p:extLst>
+      <p:ext uri="{BB962C8B-B14F-4D97-AF65-F5344CB8AC3E}">
+        <p14:creationId xmlns:p14="http://schemas.microsoft.com/office/powerpoint/2010/main" val="2804723445"/>
       </p:ext>
     </p:extLst>
   </p:cSld>
@@ -5933,6 +6823,323 @@
 </p:sld>
 </file>
 
+<file path=ppt/slides/slide20.xml><?xml version="1.0" encoding="utf-8"?>
+<p:sld xmlns:a="http://schemas.openxmlformats.org/drawingml/2006/main" xmlns:r="http://schemas.openxmlformats.org/officeDocument/2006/relationships" xmlns:p="http://schemas.openxmlformats.org/presentationml/2006/main">
+  <p:cSld>
+    <p:spTree>
+      <p:nvGrpSpPr>
+        <p:cNvPr id="1" name=""/>
+        <p:cNvGrpSpPr/>
+        <p:nvPr/>
+      </p:nvGrpSpPr>
+      <p:grpSpPr>
+        <a:xfrm>
+          <a:off x="0" y="0"/>
+          <a:ext cx="0" cy="0"/>
+          <a:chOff x="0" y="0"/>
+          <a:chExt cx="0" cy="0"/>
+        </a:xfrm>
+      </p:grpSpPr>
+      <p:sp>
+        <p:nvSpPr>
+          <p:cNvPr id="2" name="Cím 1">
+            <a:extLst>
+              <a:ext uri="{FF2B5EF4-FFF2-40B4-BE49-F238E27FC236}">
+                <a16:creationId xmlns:a16="http://schemas.microsoft.com/office/drawing/2014/main" id="{D15D6DBC-91F0-7C6B-8342-305C8BF2F4A6}"/>
+              </a:ext>
+            </a:extLst>
+          </p:cNvPr>
+          <p:cNvSpPr>
+            <a:spLocks noGrp="1"/>
+          </p:cNvSpPr>
+          <p:nvPr>
+            <p:ph type="title"/>
+          </p:nvPr>
+        </p:nvSpPr>
+        <p:spPr/>
+        <p:txBody>
+          <a:bodyPr/>
+          <a:lstStyle/>
+          <a:p>
+            <a:endParaRPr lang="hu-HU"/>
+          </a:p>
+        </p:txBody>
+      </p:sp>
+      <p:sp>
+        <p:nvSpPr>
+          <p:cNvPr id="3" name="Tartalom helye 2">
+            <a:extLst>
+              <a:ext uri="{FF2B5EF4-FFF2-40B4-BE49-F238E27FC236}">
+                <a16:creationId xmlns:a16="http://schemas.microsoft.com/office/drawing/2014/main" id="{71D0E703-E6B9-3448-425B-030650B1A57D}"/>
+              </a:ext>
+            </a:extLst>
+          </p:cNvPr>
+          <p:cNvSpPr>
+            <a:spLocks noGrp="1"/>
+          </p:cNvSpPr>
+          <p:nvPr>
+            <p:ph sz="half" idx="1"/>
+          </p:nvPr>
+        </p:nvSpPr>
+        <p:spPr/>
+        <p:txBody>
+          <a:bodyPr/>
+          <a:lstStyle/>
+          <a:p>
+            <a:endParaRPr lang="hu-HU"/>
+          </a:p>
+        </p:txBody>
+      </p:sp>
+      <p:sp>
+        <p:nvSpPr>
+          <p:cNvPr id="4" name="Tartalom helye 3">
+            <a:extLst>
+              <a:ext uri="{FF2B5EF4-FFF2-40B4-BE49-F238E27FC236}">
+                <a16:creationId xmlns:a16="http://schemas.microsoft.com/office/drawing/2014/main" id="{662C6D9F-36A3-E7C8-F7ED-686FA56BD6E8}"/>
+              </a:ext>
+            </a:extLst>
+          </p:cNvPr>
+          <p:cNvSpPr>
+            <a:spLocks noGrp="1"/>
+          </p:cNvSpPr>
+          <p:nvPr>
+            <p:ph sz="half" idx="2"/>
+          </p:nvPr>
+        </p:nvSpPr>
+        <p:spPr/>
+        <p:txBody>
+          <a:bodyPr/>
+          <a:lstStyle/>
+          <a:p>
+            <a:endParaRPr lang="hu-HU"/>
+          </a:p>
+        </p:txBody>
+      </p:sp>
+    </p:spTree>
+    <p:extLst>
+      <p:ext uri="{BB962C8B-B14F-4D97-AF65-F5344CB8AC3E}">
+        <p14:creationId xmlns:p14="http://schemas.microsoft.com/office/powerpoint/2010/main" val="4057543361"/>
+      </p:ext>
+    </p:extLst>
+  </p:cSld>
+  <p:clrMapOvr>
+    <a:masterClrMapping/>
+  </p:clrMapOvr>
+</p:sld>
+</file>
+
+<file path=ppt/slides/slide21.xml><?xml version="1.0" encoding="utf-8"?>
+<p:sld xmlns:a="http://schemas.openxmlformats.org/drawingml/2006/main" xmlns:r="http://schemas.openxmlformats.org/officeDocument/2006/relationships" xmlns:p="http://schemas.openxmlformats.org/presentationml/2006/main">
+  <p:cSld>
+    <p:spTree>
+      <p:nvGrpSpPr>
+        <p:cNvPr id="1" name=""/>
+        <p:cNvGrpSpPr/>
+        <p:nvPr/>
+      </p:nvGrpSpPr>
+      <p:grpSpPr>
+        <a:xfrm>
+          <a:off x="0" y="0"/>
+          <a:ext cx="0" cy="0"/>
+          <a:chOff x="0" y="0"/>
+          <a:chExt cx="0" cy="0"/>
+        </a:xfrm>
+      </p:grpSpPr>
+      <p:sp>
+        <p:nvSpPr>
+          <p:cNvPr id="2" name="Cím 1">
+            <a:extLst>
+              <a:ext uri="{FF2B5EF4-FFF2-40B4-BE49-F238E27FC236}">
+                <a16:creationId xmlns:a16="http://schemas.microsoft.com/office/drawing/2014/main" id="{D15D6DBC-91F0-7C6B-8342-305C8BF2F4A6}"/>
+              </a:ext>
+            </a:extLst>
+          </p:cNvPr>
+          <p:cNvSpPr>
+            <a:spLocks noGrp="1"/>
+          </p:cNvSpPr>
+          <p:nvPr>
+            <p:ph type="title"/>
+          </p:nvPr>
+        </p:nvSpPr>
+        <p:spPr/>
+        <p:txBody>
+          <a:bodyPr/>
+          <a:lstStyle/>
+          <a:p>
+            <a:endParaRPr lang="hu-HU"/>
+          </a:p>
+        </p:txBody>
+      </p:sp>
+      <p:sp>
+        <p:nvSpPr>
+          <p:cNvPr id="3" name="Tartalom helye 2">
+            <a:extLst>
+              <a:ext uri="{FF2B5EF4-FFF2-40B4-BE49-F238E27FC236}">
+                <a16:creationId xmlns:a16="http://schemas.microsoft.com/office/drawing/2014/main" id="{71D0E703-E6B9-3448-425B-030650B1A57D}"/>
+              </a:ext>
+            </a:extLst>
+          </p:cNvPr>
+          <p:cNvSpPr>
+            <a:spLocks noGrp="1"/>
+          </p:cNvSpPr>
+          <p:nvPr>
+            <p:ph sz="half" idx="1"/>
+          </p:nvPr>
+        </p:nvSpPr>
+        <p:spPr/>
+        <p:txBody>
+          <a:bodyPr/>
+          <a:lstStyle/>
+          <a:p>
+            <a:endParaRPr lang="hu-HU"/>
+          </a:p>
+        </p:txBody>
+      </p:sp>
+      <p:sp>
+        <p:nvSpPr>
+          <p:cNvPr id="4" name="Tartalom helye 3">
+            <a:extLst>
+              <a:ext uri="{FF2B5EF4-FFF2-40B4-BE49-F238E27FC236}">
+                <a16:creationId xmlns:a16="http://schemas.microsoft.com/office/drawing/2014/main" id="{662C6D9F-36A3-E7C8-F7ED-686FA56BD6E8}"/>
+              </a:ext>
+            </a:extLst>
+          </p:cNvPr>
+          <p:cNvSpPr>
+            <a:spLocks noGrp="1"/>
+          </p:cNvSpPr>
+          <p:nvPr>
+            <p:ph sz="half" idx="2"/>
+          </p:nvPr>
+        </p:nvSpPr>
+        <p:spPr/>
+        <p:txBody>
+          <a:bodyPr/>
+          <a:lstStyle/>
+          <a:p>
+            <a:endParaRPr lang="hu-HU"/>
+          </a:p>
+        </p:txBody>
+      </p:sp>
+    </p:spTree>
+    <p:extLst>
+      <p:ext uri="{BB962C8B-B14F-4D97-AF65-F5344CB8AC3E}">
+        <p14:creationId xmlns:p14="http://schemas.microsoft.com/office/powerpoint/2010/main" val="115076151"/>
+      </p:ext>
+    </p:extLst>
+  </p:cSld>
+  <p:clrMapOvr>
+    <a:masterClrMapping/>
+  </p:clrMapOvr>
+</p:sld>
+</file>
+
+<file path=ppt/slides/slide22.xml><?xml version="1.0" encoding="utf-8"?>
+<p:sld xmlns:a="http://schemas.openxmlformats.org/drawingml/2006/main" xmlns:r="http://schemas.openxmlformats.org/officeDocument/2006/relationships" xmlns:p="http://schemas.openxmlformats.org/presentationml/2006/main">
+  <p:cSld>
+    <p:spTree>
+      <p:nvGrpSpPr>
+        <p:cNvPr id="1" name=""/>
+        <p:cNvGrpSpPr/>
+        <p:nvPr/>
+      </p:nvGrpSpPr>
+      <p:grpSpPr>
+        <a:xfrm>
+          <a:off x="0" y="0"/>
+          <a:ext cx="0" cy="0"/>
+          <a:chOff x="0" y="0"/>
+          <a:chExt cx="0" cy="0"/>
+        </a:xfrm>
+      </p:grpSpPr>
+      <p:sp>
+        <p:nvSpPr>
+          <p:cNvPr id="2" name="Cím 1">
+            <a:extLst>
+              <a:ext uri="{FF2B5EF4-FFF2-40B4-BE49-F238E27FC236}">
+                <a16:creationId xmlns:a16="http://schemas.microsoft.com/office/drawing/2014/main" id="{1F5C6A10-E8B9-0DCD-BCAB-208EE1098ACF}"/>
+              </a:ext>
+            </a:extLst>
+          </p:cNvPr>
+          <p:cNvSpPr>
+            <a:spLocks noGrp="1"/>
+          </p:cNvSpPr>
+          <p:nvPr>
+            <p:ph type="title"/>
+          </p:nvPr>
+        </p:nvSpPr>
+        <p:spPr>
+          <a:xfrm>
+            <a:off x="0" y="1"/>
+            <a:ext cx="12192000" cy="2877423"/>
+          </a:xfrm>
+        </p:spPr>
+        <p:txBody>
+          <a:bodyPr>
+            <a:normAutofit/>
+          </a:bodyPr>
+          <a:lstStyle/>
+          <a:p>
+            <a:pPr algn="ctr"/>
+            <a:r>
+              <a:rPr lang="hu-HU" sz="8000" dirty="0">
+                <a:solidFill>
+                  <a:schemeClr val="accent1"/>
+                </a:solidFill>
+              </a:rPr>
+              <a:t>Köszönjük a figyelmet</a:t>
+            </a:r>
+          </a:p>
+        </p:txBody>
+      </p:sp>
+      <p:sp>
+        <p:nvSpPr>
+          <p:cNvPr id="3" name="Szöveg helye 2">
+            <a:extLst>
+              <a:ext uri="{FF2B5EF4-FFF2-40B4-BE49-F238E27FC236}">
+                <a16:creationId xmlns:a16="http://schemas.microsoft.com/office/drawing/2014/main" id="{5DEEC053-1868-41A4-AF72-8A457EBAAE2A}"/>
+              </a:ext>
+            </a:extLst>
+          </p:cNvPr>
+          <p:cNvSpPr>
+            <a:spLocks noGrp="1"/>
+          </p:cNvSpPr>
+          <p:nvPr>
+            <p:ph type="body" sz="half" idx="2"/>
+          </p:nvPr>
+        </p:nvSpPr>
+        <p:spPr/>
+        <p:txBody>
+          <a:bodyPr>
+            <a:noAutofit/>
+          </a:bodyPr>
+          <a:lstStyle/>
+          <a:p>
+            <a:r>
+              <a:rPr lang="hu-HU" sz="8000" dirty="0"/>
+              <a:t>D-A.T.M. csapata! </a:t>
+            </a:r>
+            <a:r>
+              <a:rPr lang="hu-HU" sz="8000" dirty="0">
+                <a:sym typeface="Wingdings" panose="05000000000000000000" pitchFamily="2" charset="2"/>
+              </a:rPr>
+              <a:t></a:t>
+            </a:r>
+            <a:endParaRPr lang="hu-HU" sz="8000" dirty="0"/>
+          </a:p>
+        </p:txBody>
+      </p:sp>
+    </p:spTree>
+    <p:extLst>
+      <p:ext uri="{BB962C8B-B14F-4D97-AF65-F5344CB8AC3E}">
+        <p14:creationId xmlns:p14="http://schemas.microsoft.com/office/powerpoint/2010/main" val="698503208"/>
+      </p:ext>
+    </p:extLst>
+  </p:cSld>
+  <p:clrMapOvr>
+    <a:masterClrMapping/>
+  </p:clrMapOvr>
+</p:sld>
+</file>
+
 <file path=ppt/slides/slide3.xml><?xml version="1.0" encoding="utf-8"?>
 <p:sld xmlns:a="http://schemas.openxmlformats.org/drawingml/2006/main" xmlns:r="http://schemas.openxmlformats.org/officeDocument/2006/relationships" xmlns:p="http://schemas.openxmlformats.org/presentationml/2006/main">
   <p:cSld>
@@ -5966,7 +7173,12 @@
             <p:ph type="title"/>
           </p:nvPr>
         </p:nvSpPr>
-        <p:spPr/>
+        <p:spPr>
+          <a:xfrm>
+            <a:off x="4186105" y="479148"/>
+            <a:ext cx="4593671" cy="1293028"/>
+          </a:xfrm>
+        </p:spPr>
         <p:txBody>
           <a:bodyPr/>
           <a:lstStyle/>
@@ -6076,7 +7288,7 @@
                   <a:schemeClr val="accent1"/>
                 </a:solidFill>
               </a:rPr>
-              <a:t>Hírek fül</a:t>
+              <a:t>Tóth Mór kódjai</a:t>
             </a:r>
           </a:p>
           <a:p>
@@ -6087,7 +7299,7 @@
                   <a:schemeClr val="accent1"/>
                 </a:solidFill>
               </a:rPr>
-              <a:t>Beállítások fül</a:t>
+              <a:t>Bakos Dominik kódjai</a:t>
             </a:r>
           </a:p>
           <a:p>
@@ -6098,29 +7310,7 @@
                   <a:schemeClr val="accent1"/>
                 </a:solidFill>
               </a:rPr>
-              <a:t>Autókra lebontott keresés</a:t>
-            </a:r>
-          </a:p>
-          <a:p>
-            <a:pPr lvl="1"/>
-            <a:r>
-              <a:rPr lang="hu-HU" dirty="0">
-                <a:solidFill>
-                  <a:schemeClr val="accent1"/>
-                </a:solidFill>
-              </a:rPr>
-              <a:t>Fehér és Sötét mód</a:t>
-            </a:r>
-          </a:p>
-          <a:p>
-            <a:pPr lvl="1"/>
-            <a:r>
-              <a:rPr lang="hu-HU" dirty="0">
-                <a:solidFill>
-                  <a:schemeClr val="accent1"/>
-                </a:solidFill>
-              </a:rPr>
-              <a:t>Felhasználói Profil</a:t>
+              <a:t>Farkas Máté kódjai</a:t>
             </a:r>
           </a:p>
           <a:p>
@@ -6181,7 +7371,7 @@
           <p:cNvPr id="2" name="Cím 1">
             <a:extLst>
               <a:ext uri="{FF2B5EF4-FFF2-40B4-BE49-F238E27FC236}">
-                <a16:creationId xmlns:a16="http://schemas.microsoft.com/office/drawing/2014/main" id="{A2E0E418-2A74-92C1-F07A-844E26207D29}"/>
+                <a16:creationId xmlns:a16="http://schemas.microsoft.com/office/drawing/2014/main" id="{4FB9CBF3-E32C-41A0-66CA-18EA41E76778}"/>
               </a:ext>
             </a:extLst>
           </p:cNvPr>
@@ -6189,7 +7379,7 @@
             <a:spLocks noGrp="1"/>
           </p:cNvSpPr>
           <p:nvPr>
-            <p:ph type="title"/>
+            <p:ph type="ctrTitle"/>
           </p:nvPr>
         </p:nvSpPr>
         <p:spPr/>
@@ -6200,119 +7390,10 @@
             <a:r>
               <a:rPr lang="hu-HU" dirty="0">
                 <a:solidFill>
-                  <a:schemeClr val="accent1"/>
+                  <a:srgbClr val="FF0000"/>
                 </a:solidFill>
               </a:rPr>
-              <a:t>Autókra le bontott keresés</a:t>
-            </a:r>
-          </a:p>
-        </p:txBody>
-      </p:sp>
-      <p:sp>
-        <p:nvSpPr>
-          <p:cNvPr id="3" name="Tartalom helye 2">
-            <a:extLst>
-              <a:ext uri="{FF2B5EF4-FFF2-40B4-BE49-F238E27FC236}">
-                <a16:creationId xmlns:a16="http://schemas.microsoft.com/office/drawing/2014/main" id="{FE154AB6-2B47-F4BA-4109-4D3E9D0E554F}"/>
-              </a:ext>
-            </a:extLst>
-          </p:cNvPr>
-          <p:cNvSpPr>
-            <a:spLocks noGrp="1"/>
-          </p:cNvSpPr>
-          <p:nvPr>
-            <p:ph idx="1"/>
-          </p:nvPr>
-        </p:nvSpPr>
-        <p:spPr/>
-        <p:txBody>
-          <a:bodyPr/>
-          <a:lstStyle/>
-          <a:p>
-            <a:endParaRPr lang="hu-HU" dirty="0"/>
-          </a:p>
-        </p:txBody>
-      </p:sp>
-      <p:sp>
-        <p:nvSpPr>
-          <p:cNvPr id="4" name="Szöveg helye 3">
-            <a:extLst>
-              <a:ext uri="{FF2B5EF4-FFF2-40B4-BE49-F238E27FC236}">
-                <a16:creationId xmlns:a16="http://schemas.microsoft.com/office/drawing/2014/main" id="{748FAD63-F565-B682-FC22-846276B4E5A3}"/>
-              </a:ext>
-            </a:extLst>
-          </p:cNvPr>
-          <p:cNvSpPr>
-            <a:spLocks noGrp="1"/>
-          </p:cNvSpPr>
-          <p:nvPr>
-            <p:ph type="body" sz="half" idx="2"/>
-          </p:nvPr>
-        </p:nvSpPr>
-        <p:spPr/>
-        <p:txBody>
-          <a:bodyPr/>
-          <a:lstStyle/>
-          <a:p>
-            <a:r>
-              <a:rPr lang="hu-HU" dirty="0"/>
-              <a:t>Az autókra bontott keresés előnyei:</a:t>
-            </a:r>
-          </a:p>
-          <a:p>
-            <a:pPr marL="800100" lvl="1" indent="-342900">
-              <a:buFont typeface="+mj-lt"/>
-              <a:buAutoNum type="arabicPeriod"/>
-            </a:pPr>
-            <a:r>
-              <a:rPr lang="hu-HU" sz="2400" dirty="0">
-                <a:solidFill>
-                  <a:schemeClr val="accent1"/>
-                </a:solidFill>
-              </a:rPr>
-              <a:t>Egyszerű átlátható</a:t>
-            </a:r>
-          </a:p>
-          <a:p>
-            <a:pPr marL="800100" lvl="1" indent="-342900">
-              <a:buFont typeface="+mj-lt"/>
-              <a:buAutoNum type="arabicPeriod"/>
-            </a:pPr>
-            <a:r>
-              <a:rPr lang="hu-HU" sz="2400" dirty="0">
-                <a:solidFill>
-                  <a:schemeClr val="accent1"/>
-                </a:solidFill>
-              </a:rPr>
-              <a:t>Specializált</a:t>
-            </a:r>
-          </a:p>
-          <a:p>
-            <a:pPr marL="800100" lvl="1" indent="-342900">
-              <a:buFont typeface="+mj-lt"/>
-              <a:buAutoNum type="arabicPeriod"/>
-            </a:pPr>
-            <a:r>
-              <a:rPr lang="hu-HU" sz="2400" dirty="0">
-                <a:solidFill>
-                  <a:schemeClr val="accent1"/>
-                </a:solidFill>
-              </a:rPr>
-              <a:t>Személyre szabott</a:t>
-            </a:r>
-          </a:p>
-          <a:p>
-            <a:pPr marL="800100" lvl="1" indent="-342900">
-              <a:buFont typeface="+mj-lt"/>
-              <a:buAutoNum type="arabicPeriod"/>
-            </a:pPr>
-            <a:r>
-              <a:rPr lang="hu-HU" sz="2400" dirty="0">
-                <a:solidFill>
-                  <a:schemeClr val="accent1"/>
-                </a:solidFill>
-              </a:rPr>
-              <a:t>Néhány kattintás – Zéró görgetés</a:t>
+              <a:t>Tóth mór kódjai</a:t>
             </a:r>
           </a:p>
         </p:txBody>
@@ -6320,7 +7401,7 @@
     </p:spTree>
     <p:extLst>
       <p:ext uri="{BB962C8B-B14F-4D97-AF65-F5344CB8AC3E}">
-        <p14:creationId xmlns:p14="http://schemas.microsoft.com/office/powerpoint/2010/main" val="3163941791"/>
+        <p14:creationId xmlns:p14="http://schemas.microsoft.com/office/powerpoint/2010/main" val="1513513199"/>
       </p:ext>
     </p:extLst>
   </p:cSld>
@@ -6352,7 +7433,7 @@
           <p:cNvPr id="2" name="Cím 1">
             <a:extLst>
               <a:ext uri="{FF2B5EF4-FFF2-40B4-BE49-F238E27FC236}">
-                <a16:creationId xmlns:a16="http://schemas.microsoft.com/office/drawing/2014/main" id="{049E7C48-974E-F723-5F50-01625547C8CA}"/>
+                <a16:creationId xmlns:a16="http://schemas.microsoft.com/office/drawing/2014/main" id="{D15D6DBC-91F0-7C6B-8342-305C8BF2F4A6}"/>
               </a:ext>
             </a:extLst>
           </p:cNvPr>
@@ -6368,26 +7449,7 @@
           <a:bodyPr/>
           <a:lstStyle/>
           <a:p>
-            <a:r>
-              <a:rPr lang="hu-HU" dirty="0">
-                <a:solidFill>
-                  <a:schemeClr val="accent1"/>
-                </a:solidFill>
-              </a:rPr>
-              <a:t>Hírek fül</a:t>
-            </a:r>
-            <a:br>
-              <a:rPr lang="hu-HU" dirty="0">
-                <a:solidFill>
-                  <a:schemeClr val="accent1"/>
-                </a:solidFill>
-              </a:rPr>
-            </a:br>
-            <a:endParaRPr lang="hu-HU" dirty="0">
-              <a:solidFill>
-                <a:schemeClr val="accent1"/>
-              </a:solidFill>
-            </a:endParaRPr>
+            <a:endParaRPr lang="hu-HU"/>
           </a:p>
         </p:txBody>
       </p:sp>
@@ -6396,7 +7458,7 @@
           <p:cNvPr id="3" name="Tartalom helye 2">
             <a:extLst>
               <a:ext uri="{FF2B5EF4-FFF2-40B4-BE49-F238E27FC236}">
-                <a16:creationId xmlns:a16="http://schemas.microsoft.com/office/drawing/2014/main" id="{A20785AB-030D-B045-2F7B-F35729ABF388}"/>
+                <a16:creationId xmlns:a16="http://schemas.microsoft.com/office/drawing/2014/main" id="{71D0E703-E6B9-3448-425B-030650B1A57D}"/>
               </a:ext>
             </a:extLst>
           </p:cNvPr>
@@ -6404,7 +7466,7 @@
             <a:spLocks noGrp="1"/>
           </p:cNvSpPr>
           <p:nvPr>
-            <p:ph idx="1"/>
+            <p:ph sz="half" idx="1"/>
           </p:nvPr>
         </p:nvSpPr>
         <p:spPr/>
@@ -6418,10 +7480,10 @@
       </p:sp>
       <p:sp>
         <p:nvSpPr>
-          <p:cNvPr id="4" name="Szöveg helye 3">
+          <p:cNvPr id="4" name="Tartalom helye 3">
             <a:extLst>
               <a:ext uri="{FF2B5EF4-FFF2-40B4-BE49-F238E27FC236}">
-                <a16:creationId xmlns:a16="http://schemas.microsoft.com/office/drawing/2014/main" id="{0B2BF4EE-0853-8226-9339-920E6C6A83CD}"/>
+                <a16:creationId xmlns:a16="http://schemas.microsoft.com/office/drawing/2014/main" id="{662C6D9F-36A3-E7C8-F7ED-686FA56BD6E8}"/>
               </a:ext>
             </a:extLst>
           </p:cNvPr>
@@ -6429,7 +7491,7 @@
             <a:spLocks noGrp="1"/>
           </p:cNvSpPr>
           <p:nvPr>
-            <p:ph type="body" sz="half" idx="2"/>
+            <p:ph sz="half" idx="2"/>
           </p:nvPr>
         </p:nvSpPr>
         <p:spPr/>
@@ -6444,7 +7506,7 @@
     </p:spTree>
     <p:extLst>
       <p:ext uri="{BB962C8B-B14F-4D97-AF65-F5344CB8AC3E}">
-        <p14:creationId xmlns:p14="http://schemas.microsoft.com/office/powerpoint/2010/main" val="411077666"/>
+        <p14:creationId xmlns:p14="http://schemas.microsoft.com/office/powerpoint/2010/main" val="769770222"/>
       </p:ext>
     </p:extLst>
   </p:cSld>
@@ -6476,7 +7538,7 @@
           <p:cNvPr id="2" name="Cím 1">
             <a:extLst>
               <a:ext uri="{FF2B5EF4-FFF2-40B4-BE49-F238E27FC236}">
-                <a16:creationId xmlns:a16="http://schemas.microsoft.com/office/drawing/2014/main" id="{76BB0108-ED54-E9FF-E1EF-D1349F0B75EB}"/>
+                <a16:creationId xmlns:a16="http://schemas.microsoft.com/office/drawing/2014/main" id="{D15D6DBC-91F0-7C6B-8342-305C8BF2F4A6}"/>
               </a:ext>
             </a:extLst>
           </p:cNvPr>
@@ -6492,26 +7554,7 @@
           <a:bodyPr/>
           <a:lstStyle/>
           <a:p>
-            <a:r>
-              <a:rPr lang="hu-HU" dirty="0">
-                <a:solidFill>
-                  <a:schemeClr val="accent1"/>
-                </a:solidFill>
-              </a:rPr>
-              <a:t>Beállítások fül</a:t>
-            </a:r>
-            <a:br>
-              <a:rPr lang="hu-HU" dirty="0">
-                <a:solidFill>
-                  <a:schemeClr val="accent1"/>
-                </a:solidFill>
-              </a:rPr>
-            </a:br>
-            <a:endParaRPr lang="hu-HU" dirty="0">
-              <a:solidFill>
-                <a:schemeClr val="accent1"/>
-              </a:solidFill>
-            </a:endParaRPr>
+            <a:endParaRPr lang="hu-HU"/>
           </a:p>
         </p:txBody>
       </p:sp>
@@ -6520,7 +7563,7 @@
           <p:cNvPr id="3" name="Tartalom helye 2">
             <a:extLst>
               <a:ext uri="{FF2B5EF4-FFF2-40B4-BE49-F238E27FC236}">
-                <a16:creationId xmlns:a16="http://schemas.microsoft.com/office/drawing/2014/main" id="{B987370C-E623-51CE-7E85-EB482D18D07D}"/>
+                <a16:creationId xmlns:a16="http://schemas.microsoft.com/office/drawing/2014/main" id="{71D0E703-E6B9-3448-425B-030650B1A57D}"/>
               </a:ext>
             </a:extLst>
           </p:cNvPr>
@@ -6528,7 +7571,7 @@
             <a:spLocks noGrp="1"/>
           </p:cNvSpPr>
           <p:nvPr>
-            <p:ph idx="1"/>
+            <p:ph sz="half" idx="1"/>
           </p:nvPr>
         </p:nvSpPr>
         <p:spPr/>
@@ -6542,10 +7585,10 @@
       </p:sp>
       <p:sp>
         <p:nvSpPr>
-          <p:cNvPr id="4" name="Szöveg helye 3">
+          <p:cNvPr id="4" name="Tartalom helye 3">
             <a:extLst>
               <a:ext uri="{FF2B5EF4-FFF2-40B4-BE49-F238E27FC236}">
-                <a16:creationId xmlns:a16="http://schemas.microsoft.com/office/drawing/2014/main" id="{94E65788-8FAA-FF16-0121-D0DDB8E8F712}"/>
+                <a16:creationId xmlns:a16="http://schemas.microsoft.com/office/drawing/2014/main" id="{662C6D9F-36A3-E7C8-F7ED-686FA56BD6E8}"/>
               </a:ext>
             </a:extLst>
           </p:cNvPr>
@@ -6553,7 +7596,7 @@
             <a:spLocks noGrp="1"/>
           </p:cNvSpPr>
           <p:nvPr>
-            <p:ph type="body" sz="half" idx="2"/>
+            <p:ph sz="half" idx="2"/>
           </p:nvPr>
         </p:nvSpPr>
         <p:spPr/>
@@ -6568,7 +7611,7 @@
     </p:spTree>
     <p:extLst>
       <p:ext uri="{BB962C8B-B14F-4D97-AF65-F5344CB8AC3E}">
-        <p14:creationId xmlns:p14="http://schemas.microsoft.com/office/powerpoint/2010/main" val="243804628"/>
+        <p14:creationId xmlns:p14="http://schemas.microsoft.com/office/powerpoint/2010/main" val="1893403579"/>
       </p:ext>
     </p:extLst>
   </p:cSld>
@@ -6600,7 +7643,7 @@
           <p:cNvPr id="2" name="Cím 1">
             <a:extLst>
               <a:ext uri="{FF2B5EF4-FFF2-40B4-BE49-F238E27FC236}">
-                <a16:creationId xmlns:a16="http://schemas.microsoft.com/office/drawing/2014/main" id="{CAD974B5-4296-F8D0-3F72-FC9DA3F1AA2C}"/>
+                <a16:creationId xmlns:a16="http://schemas.microsoft.com/office/drawing/2014/main" id="{D15D6DBC-91F0-7C6B-8342-305C8BF2F4A6}"/>
               </a:ext>
             </a:extLst>
           </p:cNvPr>
@@ -6616,26 +7659,7 @@
           <a:bodyPr/>
           <a:lstStyle/>
           <a:p>
-            <a:r>
-              <a:rPr lang="hu-HU" dirty="0">
-                <a:solidFill>
-                  <a:schemeClr val="accent1"/>
-                </a:solidFill>
-              </a:rPr>
-              <a:t>Profil fül</a:t>
-            </a:r>
-            <a:br>
-              <a:rPr lang="hu-HU" dirty="0">
-                <a:solidFill>
-                  <a:schemeClr val="accent1"/>
-                </a:solidFill>
-              </a:rPr>
-            </a:br>
-            <a:endParaRPr lang="hu-HU" dirty="0">
-              <a:solidFill>
-                <a:schemeClr val="accent1"/>
-              </a:solidFill>
-            </a:endParaRPr>
+            <a:endParaRPr lang="hu-HU"/>
           </a:p>
         </p:txBody>
       </p:sp>
@@ -6644,7 +7668,7 @@
           <p:cNvPr id="3" name="Tartalom helye 2">
             <a:extLst>
               <a:ext uri="{FF2B5EF4-FFF2-40B4-BE49-F238E27FC236}">
-                <a16:creationId xmlns:a16="http://schemas.microsoft.com/office/drawing/2014/main" id="{6AAED10A-7E65-2D3A-F7EA-0A71CD50D641}"/>
+                <a16:creationId xmlns:a16="http://schemas.microsoft.com/office/drawing/2014/main" id="{71D0E703-E6B9-3448-425B-030650B1A57D}"/>
               </a:ext>
             </a:extLst>
           </p:cNvPr>
@@ -6652,7 +7676,7 @@
             <a:spLocks noGrp="1"/>
           </p:cNvSpPr>
           <p:nvPr>
-            <p:ph idx="1"/>
+            <p:ph sz="half" idx="1"/>
           </p:nvPr>
         </p:nvSpPr>
         <p:spPr/>
@@ -6666,10 +7690,10 @@
       </p:sp>
       <p:sp>
         <p:nvSpPr>
-          <p:cNvPr id="4" name="Szöveg helye 3">
+          <p:cNvPr id="4" name="Tartalom helye 3">
             <a:extLst>
               <a:ext uri="{FF2B5EF4-FFF2-40B4-BE49-F238E27FC236}">
-                <a16:creationId xmlns:a16="http://schemas.microsoft.com/office/drawing/2014/main" id="{560B72E3-9247-7567-FEA1-15426C4DDA24}"/>
+                <a16:creationId xmlns:a16="http://schemas.microsoft.com/office/drawing/2014/main" id="{662C6D9F-36A3-E7C8-F7ED-686FA56BD6E8}"/>
               </a:ext>
             </a:extLst>
           </p:cNvPr>
@@ -6677,7 +7701,7 @@
             <a:spLocks noGrp="1"/>
           </p:cNvSpPr>
           <p:nvPr>
-            <p:ph type="body" sz="half" idx="2"/>
+            <p:ph sz="half" idx="2"/>
           </p:nvPr>
         </p:nvSpPr>
         <p:spPr/>
@@ -6692,7 +7716,7 @@
     </p:spTree>
     <p:extLst>
       <p:ext uri="{BB962C8B-B14F-4D97-AF65-F5344CB8AC3E}">
-        <p14:creationId xmlns:p14="http://schemas.microsoft.com/office/powerpoint/2010/main" val="825206268"/>
+        <p14:creationId xmlns:p14="http://schemas.microsoft.com/office/powerpoint/2010/main" val="1348320953"/>
       </p:ext>
     </p:extLst>
   </p:cSld>
@@ -6724,7 +7748,7 @@
           <p:cNvPr id="2" name="Cím 1">
             <a:extLst>
               <a:ext uri="{FF2B5EF4-FFF2-40B4-BE49-F238E27FC236}">
-                <a16:creationId xmlns:a16="http://schemas.microsoft.com/office/drawing/2014/main" id="{6B937B65-0D16-BA89-BCC5-D439000F728D}"/>
+                <a16:creationId xmlns:a16="http://schemas.microsoft.com/office/drawing/2014/main" id="{D15D6DBC-91F0-7C6B-8342-305C8BF2F4A6}"/>
               </a:ext>
             </a:extLst>
           </p:cNvPr>
@@ -6740,26 +7764,7 @@
           <a:bodyPr/>
           <a:lstStyle/>
           <a:p>
-            <a:r>
-              <a:rPr lang="hu-HU" dirty="0">
-                <a:solidFill>
-                  <a:schemeClr val="accent1"/>
-                </a:solidFill>
-              </a:rPr>
-              <a:t>Világos/sötét mód</a:t>
-            </a:r>
-            <a:br>
-              <a:rPr lang="hu-HU" dirty="0">
-                <a:solidFill>
-                  <a:schemeClr val="accent1"/>
-                </a:solidFill>
-              </a:rPr>
-            </a:br>
-            <a:endParaRPr lang="hu-HU" dirty="0">
-              <a:solidFill>
-                <a:schemeClr val="accent1"/>
-              </a:solidFill>
-            </a:endParaRPr>
+            <a:endParaRPr lang="hu-HU"/>
           </a:p>
         </p:txBody>
       </p:sp>
@@ -6768,7 +7773,7 @@
           <p:cNvPr id="3" name="Tartalom helye 2">
             <a:extLst>
               <a:ext uri="{FF2B5EF4-FFF2-40B4-BE49-F238E27FC236}">
-                <a16:creationId xmlns:a16="http://schemas.microsoft.com/office/drawing/2014/main" id="{D3A24406-CE65-873D-6890-F5B2F98E5DC1}"/>
+                <a16:creationId xmlns:a16="http://schemas.microsoft.com/office/drawing/2014/main" id="{71D0E703-E6B9-3448-425B-030650B1A57D}"/>
               </a:ext>
             </a:extLst>
           </p:cNvPr>
@@ -6776,7 +7781,7 @@
             <a:spLocks noGrp="1"/>
           </p:cNvSpPr>
           <p:nvPr>
-            <p:ph idx="1"/>
+            <p:ph sz="half" idx="1"/>
           </p:nvPr>
         </p:nvSpPr>
         <p:spPr/>
@@ -6790,10 +7795,10 @@
       </p:sp>
       <p:sp>
         <p:nvSpPr>
-          <p:cNvPr id="4" name="Szöveg helye 3">
+          <p:cNvPr id="4" name="Tartalom helye 3">
             <a:extLst>
               <a:ext uri="{FF2B5EF4-FFF2-40B4-BE49-F238E27FC236}">
-                <a16:creationId xmlns:a16="http://schemas.microsoft.com/office/drawing/2014/main" id="{EDFE7339-2CB0-1D3F-A33A-6CED344DB852}"/>
+                <a16:creationId xmlns:a16="http://schemas.microsoft.com/office/drawing/2014/main" id="{662C6D9F-36A3-E7C8-F7ED-686FA56BD6E8}"/>
               </a:ext>
             </a:extLst>
           </p:cNvPr>
@@ -6801,7 +7806,7 @@
             <a:spLocks noGrp="1"/>
           </p:cNvSpPr>
           <p:nvPr>
-            <p:ph type="body" sz="half" idx="2"/>
+            <p:ph sz="half" idx="2"/>
           </p:nvPr>
         </p:nvSpPr>
         <p:spPr/>
@@ -6816,7 +7821,7 @@
     </p:spTree>
     <p:extLst>
       <p:ext uri="{BB962C8B-B14F-4D97-AF65-F5344CB8AC3E}">
-        <p14:creationId xmlns:p14="http://schemas.microsoft.com/office/powerpoint/2010/main" val="838249814"/>
+        <p14:creationId xmlns:p14="http://schemas.microsoft.com/office/powerpoint/2010/main" val="1855758968"/>
       </p:ext>
     </p:extLst>
   </p:cSld>
@@ -6848,7 +7853,7 @@
           <p:cNvPr id="2" name="Cím 1">
             <a:extLst>
               <a:ext uri="{FF2B5EF4-FFF2-40B4-BE49-F238E27FC236}">
-                <a16:creationId xmlns:a16="http://schemas.microsoft.com/office/drawing/2014/main" id="{3396472D-776E-5817-B526-EBC366FF2134}"/>
+                <a16:creationId xmlns:a16="http://schemas.microsoft.com/office/drawing/2014/main" id="{D15D6DBC-91F0-7C6B-8342-305C8BF2F4A6}"/>
               </a:ext>
             </a:extLst>
           </p:cNvPr>
@@ -6864,26 +7869,7 @@
           <a:bodyPr/>
           <a:lstStyle/>
           <a:p>
-            <a:r>
-              <a:rPr lang="hu-HU" dirty="0">
-                <a:solidFill>
-                  <a:schemeClr val="accent1"/>
-                </a:solidFill>
-              </a:rPr>
-              <a:t>kosár fül</a:t>
-            </a:r>
-            <a:br>
-              <a:rPr lang="hu-HU" dirty="0">
-                <a:solidFill>
-                  <a:schemeClr val="accent1"/>
-                </a:solidFill>
-              </a:rPr>
-            </a:br>
-            <a:endParaRPr lang="hu-HU" dirty="0">
-              <a:solidFill>
-                <a:schemeClr val="accent1"/>
-              </a:solidFill>
-            </a:endParaRPr>
+            <a:endParaRPr lang="hu-HU"/>
           </a:p>
         </p:txBody>
       </p:sp>
@@ -6892,7 +7878,7 @@
           <p:cNvPr id="3" name="Tartalom helye 2">
             <a:extLst>
               <a:ext uri="{FF2B5EF4-FFF2-40B4-BE49-F238E27FC236}">
-                <a16:creationId xmlns:a16="http://schemas.microsoft.com/office/drawing/2014/main" id="{437BAAA6-9D1E-282B-DFBA-27C879BB762A}"/>
+                <a16:creationId xmlns:a16="http://schemas.microsoft.com/office/drawing/2014/main" id="{71D0E703-E6B9-3448-425B-030650B1A57D}"/>
               </a:ext>
             </a:extLst>
           </p:cNvPr>
@@ -6900,7 +7886,7 @@
             <a:spLocks noGrp="1"/>
           </p:cNvSpPr>
           <p:nvPr>
-            <p:ph idx="1"/>
+            <p:ph sz="half" idx="1"/>
           </p:nvPr>
         </p:nvSpPr>
         <p:spPr/>
@@ -6914,10 +7900,10 @@
       </p:sp>
       <p:sp>
         <p:nvSpPr>
-          <p:cNvPr id="4" name="Szöveg helye 3">
+          <p:cNvPr id="4" name="Tartalom helye 3">
             <a:extLst>
               <a:ext uri="{FF2B5EF4-FFF2-40B4-BE49-F238E27FC236}">
-                <a16:creationId xmlns:a16="http://schemas.microsoft.com/office/drawing/2014/main" id="{FEEB2B31-3A58-0674-0EF1-11A447723449}"/>
+                <a16:creationId xmlns:a16="http://schemas.microsoft.com/office/drawing/2014/main" id="{662C6D9F-36A3-E7C8-F7ED-686FA56BD6E8}"/>
               </a:ext>
             </a:extLst>
           </p:cNvPr>
@@ -6925,7 +7911,7 @@
             <a:spLocks noGrp="1"/>
           </p:cNvSpPr>
           <p:nvPr>
-            <p:ph type="body" sz="half" idx="2"/>
+            <p:ph sz="half" idx="2"/>
           </p:nvPr>
         </p:nvSpPr>
         <p:spPr/>
@@ -6940,7 +7926,7 @@
     </p:spTree>
     <p:extLst>
       <p:ext uri="{BB962C8B-B14F-4D97-AF65-F5344CB8AC3E}">
-        <p14:creationId xmlns:p14="http://schemas.microsoft.com/office/powerpoint/2010/main" val="71653648"/>
+        <p14:creationId xmlns:p14="http://schemas.microsoft.com/office/powerpoint/2010/main" val="432926501"/>
       </p:ext>
     </p:extLst>
   </p:cSld>

--- a/DATM PPT.pptx
+++ b/DATM PPT.pptx
@@ -271,6 +271,11 @@
       </a:defRPr>
     </a:lvl9pPr>
   </p:defaultTextStyle>
+  <p:extLst>
+    <p:ext uri="{EFAFB233-063F-42B5-8137-9DF3F51BA10A}">
+      <p15:sldGuideLst xmlns:p15="http://schemas.microsoft.com/office/powerpoint/2012/main"/>
+    </p:ext>
+  </p:extLst>
 </p:presentation>
 </file>
 
@@ -990,8 +995,8 @@
         </p:nvSpPr>
         <p:spPr>
           <a:xfrm>
-            <a:off x="1143225" y="685800"/>
-            <a:ext cx="4572225" cy="3429000"/>
+            <a:off x="381000" y="685800"/>
+            <a:ext cx="6096000" cy="3429000"/>
           </a:xfrm>
           <a:custGeom>
             <a:avLst/>
@@ -1094,8 +1099,8 @@
         </p:nvSpPr>
         <p:spPr>
           <a:xfrm>
-            <a:off x="1143225" y="685800"/>
-            <a:ext cx="4572225" cy="3429000"/>
+            <a:off x="381000" y="685800"/>
+            <a:ext cx="6096000" cy="3429000"/>
           </a:xfrm>
           <a:custGeom>
             <a:avLst/>
@@ -1198,8 +1203,8 @@
         </p:nvSpPr>
         <p:spPr>
           <a:xfrm>
-            <a:off x="1143225" y="685800"/>
-            <a:ext cx="4572225" cy="3429000"/>
+            <a:off x="381000" y="685800"/>
+            <a:ext cx="6096000" cy="3429000"/>
           </a:xfrm>
           <a:custGeom>
             <a:avLst/>
@@ -20372,7 +20377,7 @@
         </p:nvSpPr>
         <p:spPr>
           <a:xfrm>
-            <a:off x="2895600" y="764373"/>
+            <a:off x="0" y="639316"/>
             <a:ext cx="8610600" cy="1293028"/>
           </a:xfrm>
           <a:prstGeom prst="rect">
@@ -20406,7 +20411,11 @@
               <a:buFont typeface="Century Gothic"/>
               <a:buNone/>
             </a:pPr>
-            <a:endParaRPr/>
+            <a:r>
+              <a:rPr lang="hu-HU" dirty="0"/>
+              <a:t>Szövegkijelölés és másolás tiltása</a:t>
+            </a:r>
+            <a:endParaRPr dirty="0"/>
           </a:p>
         </p:txBody>
       </p:sp>
@@ -20455,7 +20464,7 @@
               <a:buSzPts val="2200"/>
               <a:buNone/>
             </a:pPr>
-            <a:endParaRPr/>
+            <a:endParaRPr dirty="0"/>
           </a:p>
         </p:txBody>
       </p:sp>
@@ -20508,6 +20517,36 @@
           </a:p>
         </p:txBody>
       </p:sp>
+      <p:pic>
+        <p:nvPicPr>
+          <p:cNvPr id="3" name="Kép 2">
+            <a:extLst>
+              <a:ext uri="{FF2B5EF4-FFF2-40B4-BE49-F238E27FC236}">
+                <a16:creationId xmlns:a16="http://schemas.microsoft.com/office/drawing/2014/main" id="{1192C27D-4783-4A62-99A9-C9A5F9FE7A10}"/>
+              </a:ext>
+            </a:extLst>
+          </p:cNvPr>
+          <p:cNvPicPr>
+            <a:picLocks noChangeAspect="1"/>
+          </p:cNvPicPr>
+          <p:nvPr/>
+        </p:nvPicPr>
+        <p:blipFill>
+          <a:blip r:embed="rId3"/>
+          <a:stretch>
+            <a:fillRect/>
+          </a:stretch>
+        </p:blipFill>
+        <p:spPr>
+          <a:xfrm>
+            <a:off x="894679" y="2868796"/>
+            <a:ext cx="4360432" cy="2675650"/>
+          </a:xfrm>
+          <a:prstGeom prst="rect">
+            <a:avLst/>
+          </a:prstGeom>
+        </p:spPr>
+      </p:pic>
     </p:spTree>
   </p:cSld>
   <p:clrMapOvr>
@@ -20545,8 +20584,8 @@
         </p:nvSpPr>
         <p:spPr>
           <a:xfrm>
-            <a:off x="2895600" y="764373"/>
-            <a:ext cx="8610600" cy="1293028"/>
+            <a:off x="0" y="-1"/>
+            <a:ext cx="7189694" cy="2554941"/>
           </a:xfrm>
           <a:prstGeom prst="rect">
             <a:avLst/>
@@ -20579,7 +20618,15 @@
               <a:buFont typeface="Century Gothic"/>
               <a:buNone/>
             </a:pPr>
-            <a:endParaRPr/>
+            <a:r>
+              <a:rPr lang="hu-HU" dirty="0" err="1"/>
+              <a:t>Glow</a:t>
+            </a:r>
+            <a:r>
+              <a:rPr lang="hu-HU" dirty="0"/>
+              <a:t> effektek és egyedi görgetősáv formázása</a:t>
+            </a:r>
+            <a:endParaRPr dirty="0"/>
           </a:p>
         </p:txBody>
       </p:sp>
@@ -20628,7 +20675,7 @@
               <a:buSzPts val="2200"/>
               <a:buNone/>
             </a:pPr>
-            <a:endParaRPr/>
+            <a:endParaRPr dirty="0"/>
           </a:p>
         </p:txBody>
       </p:sp>
@@ -20677,10 +20724,40 @@
               <a:buSzPts val="2200"/>
               <a:buNone/>
             </a:pPr>
-            <a:endParaRPr/>
+            <a:endParaRPr dirty="0"/>
           </a:p>
         </p:txBody>
       </p:sp>
+      <p:pic>
+        <p:nvPicPr>
+          <p:cNvPr id="3" name="Kép 2">
+            <a:extLst>
+              <a:ext uri="{FF2B5EF4-FFF2-40B4-BE49-F238E27FC236}">
+                <a16:creationId xmlns:a16="http://schemas.microsoft.com/office/drawing/2014/main" id="{765F45F6-C1E0-4601-894B-48FC0FC7E464}"/>
+              </a:ext>
+            </a:extLst>
+          </p:cNvPr>
+          <p:cNvPicPr>
+            <a:picLocks noChangeAspect="1"/>
+          </p:cNvPicPr>
+          <p:nvPr/>
+        </p:nvPicPr>
+        <p:blipFill>
+          <a:blip r:embed="rId3"/>
+          <a:stretch>
+            <a:fillRect/>
+          </a:stretch>
+        </p:blipFill>
+        <p:spPr>
+          <a:xfrm>
+            <a:off x="685800" y="2136288"/>
+            <a:ext cx="3420035" cy="4111372"/>
+          </a:xfrm>
+          <a:prstGeom prst="rect">
+            <a:avLst/>
+          </a:prstGeom>
+        </p:spPr>
+      </p:pic>
     </p:spTree>
   </p:cSld>
   <p:clrMapOvr>
@@ -20718,7 +20795,7 @@
         </p:nvSpPr>
         <p:spPr>
           <a:xfrm>
-            <a:off x="2895600" y="764373"/>
+            <a:off x="448236" y="652645"/>
             <a:ext cx="8610600" cy="1293028"/>
           </a:xfrm>
           <a:prstGeom prst="rect">
@@ -20752,7 +20829,11 @@
               <a:buFont typeface="Century Gothic"/>
               <a:buNone/>
             </a:pPr>
-            <a:endParaRPr/>
+            <a:r>
+              <a:rPr lang="hu-HU" dirty="0"/>
+              <a:t>Reszponzív nézetek</a:t>
+            </a:r>
+            <a:endParaRPr dirty="0"/>
           </a:p>
         </p:txBody>
       </p:sp>
@@ -20801,7 +20882,7 @@
               <a:buSzPts val="2200"/>
               <a:buNone/>
             </a:pPr>
-            <a:endParaRPr/>
+            <a:endParaRPr dirty="0"/>
           </a:p>
         </p:txBody>
       </p:sp>
@@ -20854,6 +20935,36 @@
           </a:p>
         </p:txBody>
       </p:sp>
+      <p:pic>
+        <p:nvPicPr>
+          <p:cNvPr id="3" name="Kép 2">
+            <a:extLst>
+              <a:ext uri="{FF2B5EF4-FFF2-40B4-BE49-F238E27FC236}">
+                <a16:creationId xmlns:a16="http://schemas.microsoft.com/office/drawing/2014/main" id="{0E86ED48-739A-4FA5-8089-BBE1A2C1568C}"/>
+              </a:ext>
+            </a:extLst>
+          </p:cNvPr>
+          <p:cNvPicPr>
+            <a:picLocks noChangeAspect="1"/>
+          </p:cNvPicPr>
+          <p:nvPr/>
+        </p:nvPicPr>
+        <p:blipFill>
+          <a:blip r:embed="rId3"/>
+          <a:stretch>
+            <a:fillRect/>
+          </a:stretch>
+        </p:blipFill>
+        <p:spPr>
+          <a:xfrm>
+            <a:off x="685800" y="639317"/>
+            <a:ext cx="2178424" cy="5566038"/>
+          </a:xfrm>
+          <a:prstGeom prst="rect">
+            <a:avLst/>
+          </a:prstGeom>
+        </p:spPr>
+      </p:pic>
     </p:spTree>
   </p:cSld>
   <p:clrMapOvr>

--- a/DATM PPT.pptx
+++ b/DATM PPT.pptx
@@ -1307,8 +1307,8 @@
         </p:nvSpPr>
         <p:spPr>
           <a:xfrm>
-            <a:off x="1143225" y="685800"/>
-            <a:ext cx="4572225" cy="3429000"/>
+            <a:off x="381000" y="685800"/>
+            <a:ext cx="6096000" cy="3429000"/>
           </a:xfrm>
           <a:custGeom>
             <a:avLst/>
@@ -1411,8 +1411,8 @@
         </p:nvSpPr>
         <p:spPr>
           <a:xfrm>
-            <a:off x="1143225" y="685800"/>
-            <a:ext cx="4572225" cy="3429000"/>
+            <a:off x="381000" y="685800"/>
+            <a:ext cx="6096000" cy="3429000"/>
           </a:xfrm>
           <a:custGeom>
             <a:avLst/>
@@ -20619,12 +20619,12 @@
               <a:buNone/>
             </a:pPr>
             <a:r>
-              <a:rPr lang="hu-HU" dirty="0" err="1"/>
-              <a:t>Glow</a:t>
+              <a:rPr lang="hu-HU" dirty="0"/>
+              <a:t>Videó el </a:t>
             </a:r>
             <a:r>
-              <a:rPr lang="hu-HU" dirty="0"/>
-              <a:t> effektek és egyedi görgetősáv formázása</a:t>
+              <a:rPr lang="hu-HU" dirty="0" err="1"/>
+              <a:t>sötétitése</a:t>
             </a:r>
             <a:endParaRPr dirty="0"/>
           </a:p>
@@ -21036,7 +21036,15 @@
               <a:buFont typeface="Century Gothic"/>
               <a:buNone/>
             </a:pPr>
-            <a:endParaRPr/>
+            <a:r>
+              <a:rPr lang="hu-HU" dirty="0"/>
+              <a:t>Kép és szöveg </a:t>
+            </a:r>
+            <a:r>
+              <a:rPr lang="hu-HU" dirty="0" err="1"/>
+              <a:t>dizájnolása</a:t>
+            </a:r>
+            <a:endParaRPr dirty="0"/>
           </a:p>
         </p:txBody>
       </p:sp>
@@ -21085,7 +21093,7 @@
               <a:buSzPts val="2200"/>
               <a:buNone/>
             </a:pPr>
-            <a:endParaRPr/>
+            <a:endParaRPr dirty="0"/>
           </a:p>
         </p:txBody>
       </p:sp>
@@ -21138,6 +21146,36 @@
           </a:p>
         </p:txBody>
       </p:sp>
+      <p:pic>
+        <p:nvPicPr>
+          <p:cNvPr id="5" name="Kép 4">
+            <a:extLst>
+              <a:ext uri="{FF2B5EF4-FFF2-40B4-BE49-F238E27FC236}">
+                <a16:creationId xmlns:a16="http://schemas.microsoft.com/office/drawing/2014/main" id="{CB2950D6-A7CC-325D-6A15-1E645E554578}"/>
+              </a:ext>
+            </a:extLst>
+          </p:cNvPr>
+          <p:cNvPicPr>
+            <a:picLocks noChangeAspect="1"/>
+          </p:cNvPicPr>
+          <p:nvPr/>
+        </p:nvPicPr>
+        <p:blipFill>
+          <a:blip r:embed="rId3"/>
+          <a:stretch>
+            <a:fillRect/>
+          </a:stretch>
+        </p:blipFill>
+        <p:spPr>
+          <a:xfrm>
+            <a:off x="775962" y="898768"/>
+            <a:ext cx="2576838" cy="5194859"/>
+          </a:xfrm>
+          <a:prstGeom prst="rect">
+            <a:avLst/>
+          </a:prstGeom>
+        </p:spPr>
+      </p:pic>
     </p:spTree>
   </p:cSld>
   <p:clrMapOvr>
@@ -21175,7 +21213,7 @@
         </p:nvSpPr>
         <p:spPr>
           <a:xfrm>
-            <a:off x="2895600" y="764373"/>
+            <a:off x="0" y="783931"/>
             <a:ext cx="8610600" cy="1293028"/>
           </a:xfrm>
           <a:prstGeom prst="rect">
@@ -21209,7 +21247,11 @@
               <a:buFont typeface="Century Gothic"/>
               <a:buNone/>
             </a:pPr>
-            <a:endParaRPr/>
+            <a:r>
+              <a:rPr lang="hu-HU" dirty="0"/>
+              <a:t>Világitó effektus </a:t>
+            </a:r>
+            <a:endParaRPr dirty="0"/>
           </a:p>
         </p:txBody>
       </p:sp>
@@ -21258,7 +21300,7 @@
               <a:buSzPts val="2200"/>
               <a:buNone/>
             </a:pPr>
-            <a:endParaRPr/>
+            <a:endParaRPr dirty="0"/>
           </a:p>
         </p:txBody>
       </p:sp>
@@ -21307,10 +21349,40 @@
               <a:buSzPts val="2200"/>
               <a:buNone/>
             </a:pPr>
-            <a:endParaRPr/>
+            <a:endParaRPr dirty="0"/>
           </a:p>
         </p:txBody>
       </p:sp>
+      <p:pic>
+        <p:nvPicPr>
+          <p:cNvPr id="3" name="Kép 2">
+            <a:extLst>
+              <a:ext uri="{FF2B5EF4-FFF2-40B4-BE49-F238E27FC236}">
+                <a16:creationId xmlns:a16="http://schemas.microsoft.com/office/drawing/2014/main" id="{5B062E6A-FDB2-75FE-4549-C0ADD0376617}"/>
+              </a:ext>
+            </a:extLst>
+          </p:cNvPr>
+          <p:cNvPicPr>
+            <a:picLocks noChangeAspect="1"/>
+          </p:cNvPicPr>
+          <p:nvPr/>
+        </p:nvPicPr>
+        <p:blipFill>
+          <a:blip r:embed="rId3"/>
+          <a:stretch>
+            <a:fillRect/>
+          </a:stretch>
+        </p:blipFill>
+        <p:spPr>
+          <a:xfrm>
+            <a:off x="789845" y="2452644"/>
+            <a:ext cx="5229955" cy="2495898"/>
+          </a:xfrm>
+          <a:prstGeom prst="rect">
+            <a:avLst/>
+          </a:prstGeom>
+        </p:spPr>
+      </p:pic>
     </p:spTree>
   </p:cSld>
   <p:clrMapOvr>

--- a/DATM PPT.pptx
+++ b/DATM PPT.pptx
@@ -21168,7 +21168,7 @@
         </p:blipFill>
         <p:spPr>
           <a:xfrm>
-            <a:off x="775962" y="898768"/>
+            <a:off x="798479" y="1244997"/>
             <a:ext cx="2576838" cy="5194859"/>
           </a:xfrm>
           <a:prstGeom prst="rect">
@@ -22703,7 +22703,7 @@
         </p:blipFill>
         <p:spPr>
           <a:xfrm>
-            <a:off x="1138425" y="1933114"/>
+            <a:off x="3872747" y="2057401"/>
             <a:ext cx="3765181" cy="4024125"/>
           </a:xfrm>
           <a:prstGeom prst="rect">
@@ -22713,36 +22713,6 @@
           <a:ln>
             <a:noFill/>
           </a:ln>
-        </p:spPr>
-      </p:pic>
-      <p:pic>
-        <p:nvPicPr>
-          <p:cNvPr id="3" name="Kép 2">
-            <a:extLst>
-              <a:ext uri="{FF2B5EF4-FFF2-40B4-BE49-F238E27FC236}">
-                <a16:creationId xmlns:a16="http://schemas.microsoft.com/office/drawing/2014/main" id="{AD4503ED-B672-8605-4D6B-31830773E72B}"/>
-              </a:ext>
-            </a:extLst>
-          </p:cNvPr>
-          <p:cNvPicPr>
-            <a:picLocks noChangeAspect="1"/>
-          </p:cNvPicPr>
-          <p:nvPr/>
-        </p:nvPicPr>
-        <p:blipFill>
-          <a:blip r:embed="rId4"/>
-          <a:stretch>
-            <a:fillRect/>
-          </a:stretch>
-        </p:blipFill>
-        <p:spPr>
-          <a:xfrm>
-            <a:off x="5761607" y="3190080"/>
-            <a:ext cx="5664398" cy="2767159"/>
-          </a:xfrm>
-          <a:prstGeom prst="rect">
-            <a:avLst/>
-          </a:prstGeom>
         </p:spPr>
       </p:pic>
     </p:spTree>
@@ -22840,8 +22810,8 @@
         </p:blipFill>
         <p:spPr>
           <a:xfrm>
-            <a:off x="834219" y="2127683"/>
-            <a:ext cx="4122762" cy="2027067"/>
+            <a:off x="1922931" y="2438400"/>
+            <a:ext cx="6130500" cy="3109156"/>
           </a:xfrm>
           <a:prstGeom prst="rect">
             <a:avLst/>
@@ -22850,36 +22820,6 @@
           <a:ln>
             <a:noFill/>
           </a:ln>
-        </p:spPr>
-      </p:pic>
-      <p:pic>
-        <p:nvPicPr>
-          <p:cNvPr id="3" name="Kép 2">
-            <a:extLst>
-              <a:ext uri="{FF2B5EF4-FFF2-40B4-BE49-F238E27FC236}">
-                <a16:creationId xmlns:a16="http://schemas.microsoft.com/office/drawing/2014/main" id="{C32242CE-E0DE-8DBC-07A6-5A550232590C}"/>
-              </a:ext>
-            </a:extLst>
-          </p:cNvPr>
-          <p:cNvPicPr>
-            <a:picLocks noChangeAspect="1"/>
-          </p:cNvPicPr>
-          <p:nvPr/>
-        </p:nvPicPr>
-        <p:blipFill>
-          <a:blip r:embed="rId4"/>
-          <a:stretch>
-            <a:fillRect/>
-          </a:stretch>
-        </p:blipFill>
-        <p:spPr>
-          <a:xfrm>
-            <a:off x="5370991" y="3193761"/>
-            <a:ext cx="6338656" cy="3213678"/>
-          </a:xfrm>
-          <a:prstGeom prst="rect">
-            <a:avLst/>
-          </a:prstGeom>
         </p:spPr>
       </p:pic>
     </p:spTree>
@@ -22977,8 +22917,8 @@
         </p:blipFill>
         <p:spPr>
           <a:xfrm>
-            <a:off x="571685" y="1954497"/>
-            <a:ext cx="4266646" cy="2044768"/>
+            <a:off x="820259" y="1683853"/>
+            <a:ext cx="7956188" cy="4409774"/>
           </a:xfrm>
           <a:prstGeom prst="rect">
             <a:avLst/>
@@ -22987,36 +22927,6 @@
           <a:ln>
             <a:noFill/>
           </a:ln>
-        </p:spPr>
-      </p:pic>
-      <p:pic>
-        <p:nvPicPr>
-          <p:cNvPr id="3" name="Kép 2">
-            <a:extLst>
-              <a:ext uri="{FF2B5EF4-FFF2-40B4-BE49-F238E27FC236}">
-                <a16:creationId xmlns:a16="http://schemas.microsoft.com/office/drawing/2014/main" id="{680729D2-8B82-1268-40FA-E31A552FDDE7}"/>
-              </a:ext>
-            </a:extLst>
-          </p:cNvPr>
-          <p:cNvPicPr>
-            <a:picLocks noChangeAspect="1"/>
-          </p:cNvPicPr>
-          <p:nvPr/>
-        </p:nvPicPr>
-        <p:blipFill>
-          <a:blip r:embed="rId4"/>
-          <a:stretch>
-            <a:fillRect/>
-          </a:stretch>
-        </p:blipFill>
-        <p:spPr>
-          <a:xfrm>
-            <a:off x="5740795" y="2388148"/>
-            <a:ext cx="3847089" cy="3705479"/>
-          </a:xfrm>
-          <a:prstGeom prst="rect">
-            <a:avLst/>
-          </a:prstGeom>
         </p:spPr>
       </p:pic>
     </p:spTree>
@@ -23114,8 +23024,8 @@
         </p:blipFill>
         <p:spPr>
           <a:xfrm>
-            <a:off x="5179424" y="4969276"/>
-            <a:ext cx="6326776" cy="1526327"/>
+            <a:off x="766482" y="2344337"/>
+            <a:ext cx="9946341" cy="3036446"/>
           </a:xfrm>
           <a:prstGeom prst="rect">
             <a:avLst/>
@@ -23124,36 +23034,6 @@
           <a:ln>
             <a:noFill/>
           </a:ln>
-        </p:spPr>
-      </p:pic>
-      <p:pic>
-        <p:nvPicPr>
-          <p:cNvPr id="3" name="Kép 2">
-            <a:extLst>
-              <a:ext uri="{FF2B5EF4-FFF2-40B4-BE49-F238E27FC236}">
-                <a16:creationId xmlns:a16="http://schemas.microsoft.com/office/drawing/2014/main" id="{ED19784B-2F51-CD0B-EAEB-99C8F9BBFE72}"/>
-              </a:ext>
-            </a:extLst>
-          </p:cNvPr>
-          <p:cNvPicPr>
-            <a:picLocks noChangeAspect="1"/>
-          </p:cNvPicPr>
-          <p:nvPr/>
-        </p:nvPicPr>
-        <p:blipFill>
-          <a:blip r:embed="rId4"/>
-          <a:stretch>
-            <a:fillRect/>
-          </a:stretch>
-        </p:blipFill>
-        <p:spPr>
-          <a:xfrm>
-            <a:off x="239697" y="1693239"/>
-            <a:ext cx="6019059" cy="2940417"/>
-          </a:xfrm>
-          <a:prstGeom prst="rect">
-            <a:avLst/>
-          </a:prstGeom>
         </p:spPr>
       </p:pic>
     </p:spTree>
@@ -23261,36 +23141,6 @@
           <a:ln>
             <a:noFill/>
           </a:ln>
-        </p:spPr>
-      </p:pic>
-      <p:pic>
-        <p:nvPicPr>
-          <p:cNvPr id="3" name="Kép 2">
-            <a:extLst>
-              <a:ext uri="{FF2B5EF4-FFF2-40B4-BE49-F238E27FC236}">
-                <a16:creationId xmlns:a16="http://schemas.microsoft.com/office/drawing/2014/main" id="{A0E6E046-1A85-C82E-EB83-C67B78CD7EBB}"/>
-              </a:ext>
-            </a:extLst>
-          </p:cNvPr>
-          <p:cNvPicPr>
-            <a:picLocks noChangeAspect="1"/>
-          </p:cNvPicPr>
-          <p:nvPr/>
-        </p:nvPicPr>
-        <p:blipFill>
-          <a:blip r:embed="rId4"/>
-          <a:stretch>
-            <a:fillRect/>
-          </a:stretch>
-        </p:blipFill>
-        <p:spPr>
-          <a:xfrm>
-            <a:off x="6372578" y="2229671"/>
-            <a:ext cx="248413" cy="3727245"/>
-          </a:xfrm>
-          <a:prstGeom prst="rect">
-            <a:avLst/>
-          </a:prstGeom>
         </p:spPr>
       </p:pic>
     </p:spTree>
